--- a/Presentations/Module_2_Bill_of_Materials_Presentation.pptx
+++ b/Presentations/Module_2_Bill_of_Materials_Presentation.pptx
@@ -2,27 +2,30 @@
 <file path=ppt/presentation.xml><?xml version="1.0" encoding="utf-8"?>
 <p:presentation xmlns:p="http://schemas.openxmlformats.org/presentationml/2006/main">
   <p:sldMasterIdLst>
-    <p:sldMasterId xmlns:r="http://schemas.openxmlformats.org/officeDocument/2006/relationships" id="2147483648" r:id="R4fcb9e363a074038"/>
+    <p:sldMasterId xmlns:r="http://schemas.openxmlformats.org/officeDocument/2006/relationships" id="2147483648" r:id="Rdc540c80d1af42ad"/>
   </p:sldMasterIdLst>
   <p:notesMasterIdLst>
-    <p:notesMasterId xmlns:r="http://schemas.openxmlformats.org/officeDocument/2006/relationships" r:id="Rbea71bab0338407a"/>
+    <p:notesMasterId xmlns:r="http://schemas.openxmlformats.org/officeDocument/2006/relationships" r:id="R85c1aedebbdc4068"/>
   </p:notesMasterIdLst>
   <p:sldIdLst>
-    <p:sldId xmlns:r="http://schemas.openxmlformats.org/officeDocument/2006/relationships" id="256" r:id="R60a4b7a761e74b7a"/>
-    <p:sldId xmlns:r="http://schemas.openxmlformats.org/officeDocument/2006/relationships" id="257" r:id="Ra8b69bc0b61848c6"/>
-    <p:sldId xmlns:r="http://schemas.openxmlformats.org/officeDocument/2006/relationships" id="258" r:id="R2826c0c90ec14236"/>
-    <p:sldId xmlns:r="http://schemas.openxmlformats.org/officeDocument/2006/relationships" id="259" r:id="R6fea7f203aa34ede"/>
-    <p:sldId xmlns:r="http://schemas.openxmlformats.org/officeDocument/2006/relationships" id="260" r:id="Rf1a28765b1f04955"/>
-    <p:sldId xmlns:r="http://schemas.openxmlformats.org/officeDocument/2006/relationships" id="261" r:id="Rae504c7713404a7d"/>
-    <p:sldId xmlns:r="http://schemas.openxmlformats.org/officeDocument/2006/relationships" id="262" r:id="Re89571055fc4433b"/>
-    <p:sldId xmlns:r="http://schemas.openxmlformats.org/officeDocument/2006/relationships" id="263" r:id="R965f1931b0df448f"/>
-    <p:sldId xmlns:r="http://schemas.openxmlformats.org/officeDocument/2006/relationships" id="264" r:id="R99daededbfe94bcb"/>
-    <p:sldId xmlns:r="http://schemas.openxmlformats.org/officeDocument/2006/relationships" id="265" r:id="Rbf213ac384754a81"/>
-    <p:sldId xmlns:r="http://schemas.openxmlformats.org/officeDocument/2006/relationships" id="266" r:id="R01bfd074fceb40b1"/>
-    <p:sldId xmlns:r="http://schemas.openxmlformats.org/officeDocument/2006/relationships" id="267" r:id="R9472721e73024463"/>
-    <p:sldId xmlns:r="http://schemas.openxmlformats.org/officeDocument/2006/relationships" id="268" r:id="R1a97838179dd472a"/>
-    <p:sldId xmlns:r="http://schemas.openxmlformats.org/officeDocument/2006/relationships" id="269" r:id="Ref6a70b5a42947f5"/>
-    <p:sldId xmlns:r="http://schemas.openxmlformats.org/officeDocument/2006/relationships" id="270" r:id="R60ef3617c43a470a"/>
+    <p:sldId xmlns:r="http://schemas.openxmlformats.org/officeDocument/2006/relationships" id="256" r:id="R81a5d1e5c9c6472c"/>
+    <p:sldId xmlns:r="http://schemas.openxmlformats.org/officeDocument/2006/relationships" id="257" r:id="Re77fb0969e1c47e7"/>
+    <p:sldId xmlns:r="http://schemas.openxmlformats.org/officeDocument/2006/relationships" id="258" r:id="R346f8a1cf3264f17"/>
+    <p:sldId xmlns:r="http://schemas.openxmlformats.org/officeDocument/2006/relationships" id="259" r:id="Rf582307eaa4a4e06"/>
+    <p:sldId xmlns:r="http://schemas.openxmlformats.org/officeDocument/2006/relationships" id="260" r:id="Rf6d843efdc994756"/>
+    <p:sldId xmlns:r="http://schemas.openxmlformats.org/officeDocument/2006/relationships" id="261" r:id="Rcc1bc8de603240ad"/>
+    <p:sldId xmlns:r="http://schemas.openxmlformats.org/officeDocument/2006/relationships" id="262" r:id="R52d384617c664511"/>
+    <p:sldId xmlns:r="http://schemas.openxmlformats.org/officeDocument/2006/relationships" id="263" r:id="R25c492f65d8e48ca"/>
+    <p:sldId xmlns:r="http://schemas.openxmlformats.org/officeDocument/2006/relationships" id="264" r:id="Rd415178237204e28"/>
+    <p:sldId xmlns:r="http://schemas.openxmlformats.org/officeDocument/2006/relationships" id="265" r:id="R5210269161d24067"/>
+    <p:sldId xmlns:r="http://schemas.openxmlformats.org/officeDocument/2006/relationships" id="266" r:id="R734e1da076214945"/>
+    <p:sldId xmlns:r="http://schemas.openxmlformats.org/officeDocument/2006/relationships" id="267" r:id="R1d42b1b7e9a54bab"/>
+    <p:sldId xmlns:r="http://schemas.openxmlformats.org/officeDocument/2006/relationships" id="268" r:id="R0b117204c77349b9"/>
+    <p:sldId xmlns:r="http://schemas.openxmlformats.org/officeDocument/2006/relationships" id="269" r:id="R1564218707c84cc9"/>
+    <p:sldId xmlns:r="http://schemas.openxmlformats.org/officeDocument/2006/relationships" id="270" r:id="Rb5514a345e854517"/>
+    <p:sldId xmlns:r="http://schemas.openxmlformats.org/officeDocument/2006/relationships" id="271" r:id="Rf79ddf1ec701446d"/>
+    <p:sldId xmlns:r="http://schemas.openxmlformats.org/officeDocument/2006/relationships" id="272" r:id="R6780423529034daf"/>
+    <p:sldId xmlns:r="http://schemas.openxmlformats.org/officeDocument/2006/relationships" id="273" r:id="Ree69bc9c7fc24584"/>
   </p:sldIdLst>
   <p:sldSz cx="12192000" cy="6858000"/>
   <p:notesSz cx="6858000" cy="9144000"/>
@@ -583,7 +586,7 @@
           <a:lstStyle xmlns:a="http://schemas.openxmlformats.org/drawingml/2006/main"/>
           <a:p xmlns:a="http://schemas.openxmlformats.org/drawingml/2006/main">
             <a:r>
-              <a:t>Introduce Module 2. Open the matching Word tutorial after the exercise overview.</a:t>
+              <a:t>Open the matching Word tutorial after the exercise overview. Source: Module 2 Word tutorial.</a:t>
             </a:r>
           </a:p>
         </p:txBody>
@@ -653,7 +656,7 @@
           <a:lstStyle xmlns:a="http://schemas.openxmlformats.org/drawingml/2006/main"/>
           <a:p xmlns:a="http://schemas.openxmlformats.org/drawingml/2006/main">
             <a:r>
-              <a:t>After tutorial Step 8: run the app or inspect the code. Ask students to explain the observed result. Source: Module 2 Word tutorial.</a:t>
+              <a:t>After tutorial Step 7: run the app or inspect the code. Ask students to explain the observed result. Source: Module 2 Word tutorial.</a:t>
             </a:r>
           </a:p>
         </p:txBody>
@@ -723,7 +726,7 @@
           <a:lstStyle xmlns:a="http://schemas.openxmlformats.org/drawingml/2006/main"/>
           <a:p xmlns:a="http://schemas.openxmlformats.org/drawingml/2006/main">
             <a:r>
-              <a:t>Before tutorial Step 9: explain these concepts. Ask students to predict what the change will do. Then open Step 9 in the Word tutorial. Source: Module 2 Word tutorial.</a:t>
+              <a:t>Before tutorial Step 8: explain these concepts. Ask students to predict what the change will do. Then open Step 8 in the Word tutorial. Source: Module 2 Word tutorial. Related MAUI documentation: https://learn.microsoft.com/dotnet/maui/user-interface/controls/collectionview/populate-data</a:t>
             </a:r>
           </a:p>
         </p:txBody>
@@ -793,7 +796,7 @@
           <a:lstStyle xmlns:a="http://schemas.openxmlformats.org/drawingml/2006/main"/>
           <a:p xmlns:a="http://schemas.openxmlformats.org/drawingml/2006/main">
             <a:r>
-              <a:t>After tutorial Step 9: run the app or inspect the code. Ask students to explain the observed result. Source: Module 2 Word tutorial.</a:t>
+              <a:t>After tutorial Step 8: run the app or inspect the code. Ask students to explain the observed result. Source: Module 2 Word tutorial.</a:t>
             </a:r>
           </a:p>
         </p:txBody>
@@ -863,7 +866,7 @@
           <a:lstStyle xmlns:a="http://schemas.openxmlformats.org/drawingml/2006/main"/>
           <a:p xmlns:a="http://schemas.openxmlformats.org/drawingml/2006/main">
             <a:r>
-              <a:t>Before tutorial Step 11: explain these concepts. Ask students to predict what the change will do. Then open Step 11 in the Word tutorial. Source: Module 2 Word tutorial.</a:t>
+              <a:t>Before tutorial Step 9: explain these concepts. Ask students to predict what the change will do. Then open Step 9 in the Word tutorial. Source: Module 2 Word tutorial. Related MAUI documentation: https://learn.microsoft.com/dotnet/maui/user-interface/controls/collectionview/populate-data</a:t>
             </a:r>
           </a:p>
         </p:txBody>
@@ -933,7 +936,7 @@
           <a:lstStyle xmlns:a="http://schemas.openxmlformats.org/drawingml/2006/main"/>
           <a:p xmlns:a="http://schemas.openxmlformats.org/drawingml/2006/main">
             <a:r>
-              <a:t>After tutorial Step 11: run the app or inspect the code. Ask students to explain the observed result. Source: Module 2 Word tutorial.</a:t>
+              <a:t>After tutorial Step 9: run the app or inspect the code. Ask students to explain the observed result. Source: Module 2 Word tutorial.</a:t>
             </a:r>
           </a:p>
         </p:txBody>
@@ -1003,7 +1006,217 @@
           <a:lstStyle xmlns:a="http://schemas.openxmlformats.org/drawingml/2006/main"/>
           <a:p xmlns:a="http://schemas.openxmlformats.org/drawingml/2006/main">
             <a:r>
+              <a:t>Before tutorial Step 11: explain these concepts. Ask students to predict what the change will do. Then open Step 11 in the Word tutorial. Source: Module 2 Word tutorial. Related MAUI documentation: https://learn.microsoft.com/dotnet/maui/user-interface/controls/collectionview/populate-data</a:t>
+            </a:r>
+          </a:p>
+        </p:txBody>
+      </p:sp>
+      <p:sp>
+        <p:nvSpPr>
+          <p:cNvPr id="4" name="Slide Number Placeholder 3"/>
+          <p:cNvSpPr>
+            <a:spLocks xmlns:a="http://schemas.openxmlformats.org/drawingml/2006/main" noGrp="1"/>
+          </p:cNvSpPr>
+          <p:nvPr>
+            <p:ph type="sldNum" idx="5"/>
+          </p:nvPr>
+        </p:nvSpPr>
+        <p:spPr/>
+        <p:txBody>
+          <a:bodyPr xmlns:a="http://schemas.openxmlformats.org/drawingml/2006/main"/>
+          <a:lstStyle xmlns:a="http://schemas.openxmlformats.org/drawingml/2006/main"/>
+          <a:p xmlns:a="http://schemas.openxmlformats.org/drawingml/2006/main"/>
+        </p:txBody>
+      </p:sp>
+    </p:spTree>
+  </p:cSld>
+  <p:clrMapOvr>
+    <a:masterClrMapping xmlns:a="http://schemas.openxmlformats.org/drawingml/2006/main"/>
+  </p:clrMapOvr>
+</p:notes>
+</file>
+
+<file path=ppt/notesSlides/notesSlide16.xml><?xml version="1.0" encoding="utf-8"?>
+<p:notes xmlns:p="http://schemas.openxmlformats.org/presentationml/2006/main">
+  <p:cSld>
+    <p:spTree>
+      <p:nvGrpSpPr>
+        <p:cNvPr id="1" name=""/>
+        <p:cNvGrpSpPr/>
+        <p:nvPr/>
+      </p:nvGrpSpPr>
+      <p:grpSpPr>
+        <a:xfrm xmlns:a="http://schemas.openxmlformats.org/drawingml/2006/main"/>
+      </p:grpSpPr>
+      <p:sp>
+        <p:nvSpPr>
+          <p:cNvPr id="2" name="Slide Image Placeholder 1"/>
+          <p:cNvSpPr>
+            <a:spLocks xmlns:a="http://schemas.openxmlformats.org/drawingml/2006/main" noGrp="1"/>
+          </p:cNvSpPr>
+          <p:nvPr>
+            <p:ph type="sldImg" idx="0"/>
+          </p:nvPr>
+        </p:nvSpPr>
+        <p:spPr/>
+      </p:sp>
+      <p:sp>
+        <p:nvSpPr>
+          <p:cNvPr id="3" name="Notes Placeholder 2"/>
+          <p:cNvSpPr>
+            <a:spLocks xmlns:a="http://schemas.openxmlformats.org/drawingml/2006/main" noGrp="1"/>
+          </p:cNvSpPr>
+          <p:nvPr>
+            <p:ph type="body" idx="1"/>
+          </p:nvPr>
+        </p:nvSpPr>
+        <p:spPr/>
+        <p:txBody>
+          <a:bodyPr xmlns:a="http://schemas.openxmlformats.org/drawingml/2006/main"/>
+          <a:lstStyle xmlns:a="http://schemas.openxmlformats.org/drawingml/2006/main"/>
+          <a:p xmlns:a="http://schemas.openxmlformats.org/drawingml/2006/main">
+            <a:r>
+              <a:t>After tutorial Step 11: run the app or inspect the code. Ask students to explain the observed result. Source: Module 2 Word tutorial.</a:t>
+            </a:r>
+          </a:p>
+        </p:txBody>
+      </p:sp>
+      <p:sp>
+        <p:nvSpPr>
+          <p:cNvPr id="4" name="Slide Number Placeholder 3"/>
+          <p:cNvSpPr>
+            <a:spLocks xmlns:a="http://schemas.openxmlformats.org/drawingml/2006/main" noGrp="1"/>
+          </p:cNvSpPr>
+          <p:nvPr>
+            <p:ph type="sldNum" idx="5"/>
+          </p:nvPr>
+        </p:nvSpPr>
+        <p:spPr/>
+        <p:txBody>
+          <a:bodyPr xmlns:a="http://schemas.openxmlformats.org/drawingml/2006/main"/>
+          <a:lstStyle xmlns:a="http://schemas.openxmlformats.org/drawingml/2006/main"/>
+          <a:p xmlns:a="http://schemas.openxmlformats.org/drawingml/2006/main"/>
+        </p:txBody>
+      </p:sp>
+    </p:spTree>
+  </p:cSld>
+  <p:clrMapOvr>
+    <a:masterClrMapping xmlns:a="http://schemas.openxmlformats.org/drawingml/2006/main"/>
+  </p:clrMapOvr>
+</p:notes>
+</file>
+
+<file path=ppt/notesSlides/notesSlide17.xml><?xml version="1.0" encoding="utf-8"?>
+<p:notes xmlns:p="http://schemas.openxmlformats.org/presentationml/2006/main">
+  <p:cSld>
+    <p:spTree>
+      <p:nvGrpSpPr>
+        <p:cNvPr id="1" name=""/>
+        <p:cNvGrpSpPr/>
+        <p:nvPr/>
+      </p:nvGrpSpPr>
+      <p:grpSpPr>
+        <a:xfrm xmlns:a="http://schemas.openxmlformats.org/drawingml/2006/main"/>
+      </p:grpSpPr>
+      <p:sp>
+        <p:nvSpPr>
+          <p:cNvPr id="2" name="Slide Image Placeholder 1"/>
+          <p:cNvSpPr>
+            <a:spLocks xmlns:a="http://schemas.openxmlformats.org/drawingml/2006/main" noGrp="1"/>
+          </p:cNvSpPr>
+          <p:nvPr>
+            <p:ph type="sldImg" idx="0"/>
+          </p:nvPr>
+        </p:nvSpPr>
+        <p:spPr/>
+      </p:sp>
+      <p:sp>
+        <p:nvSpPr>
+          <p:cNvPr id="3" name="Notes Placeholder 2"/>
+          <p:cNvSpPr>
+            <a:spLocks xmlns:a="http://schemas.openxmlformats.org/drawingml/2006/main" noGrp="1"/>
+          </p:cNvSpPr>
+          <p:nvPr>
+            <p:ph type="body" idx="1"/>
+          </p:nvPr>
+        </p:nvSpPr>
+        <p:spPr/>
+        <p:txBody>
+          <a:bodyPr xmlns:a="http://schemas.openxmlformats.org/drawingml/2006/main"/>
+          <a:lstStyle xmlns:a="http://schemas.openxmlformats.org/drawingml/2006/main"/>
+          <a:p xmlns:a="http://schemas.openxmlformats.org/drawingml/2006/main">
+            <a:r>
               <a:t>Use the final tutorial checklist. Ask students to explain the module concept without reading code. Source: Module 2 Word tutorial.</a:t>
+            </a:r>
+          </a:p>
+        </p:txBody>
+      </p:sp>
+      <p:sp>
+        <p:nvSpPr>
+          <p:cNvPr id="4" name="Slide Number Placeholder 3"/>
+          <p:cNvSpPr>
+            <a:spLocks xmlns:a="http://schemas.openxmlformats.org/drawingml/2006/main" noGrp="1"/>
+          </p:cNvSpPr>
+          <p:nvPr>
+            <p:ph type="sldNum" idx="5"/>
+          </p:nvPr>
+        </p:nvSpPr>
+        <p:spPr/>
+        <p:txBody>
+          <a:bodyPr xmlns:a="http://schemas.openxmlformats.org/drawingml/2006/main"/>
+          <a:lstStyle xmlns:a="http://schemas.openxmlformats.org/drawingml/2006/main"/>
+          <a:p xmlns:a="http://schemas.openxmlformats.org/drawingml/2006/main"/>
+        </p:txBody>
+      </p:sp>
+    </p:spTree>
+  </p:cSld>
+  <p:clrMapOvr>
+    <a:masterClrMapping xmlns:a="http://schemas.openxmlformats.org/drawingml/2006/main"/>
+  </p:clrMapOvr>
+</p:notes>
+</file>
+
+<file path=ppt/notesSlides/notesSlide18.xml><?xml version="1.0" encoding="utf-8"?>
+<p:notes xmlns:p="http://schemas.openxmlformats.org/presentationml/2006/main">
+  <p:cSld>
+    <p:spTree>
+      <p:nvGrpSpPr>
+        <p:cNvPr id="1" name=""/>
+        <p:cNvGrpSpPr/>
+        <p:nvPr/>
+      </p:nvGrpSpPr>
+      <p:grpSpPr>
+        <a:xfrm xmlns:a="http://schemas.openxmlformats.org/drawingml/2006/main"/>
+      </p:grpSpPr>
+      <p:sp>
+        <p:nvSpPr>
+          <p:cNvPr id="2" name="Slide Image Placeholder 1"/>
+          <p:cNvSpPr>
+            <a:spLocks xmlns:a="http://schemas.openxmlformats.org/drawingml/2006/main" noGrp="1"/>
+          </p:cNvSpPr>
+          <p:nvPr>
+            <p:ph type="sldImg" idx="0"/>
+          </p:nvPr>
+        </p:nvSpPr>
+        <p:spPr/>
+      </p:sp>
+      <p:sp>
+        <p:nvSpPr>
+          <p:cNvPr id="3" name="Notes Placeholder 2"/>
+          <p:cNvSpPr>
+            <a:spLocks xmlns:a="http://schemas.openxmlformats.org/drawingml/2006/main" noGrp="1"/>
+          </p:cNvSpPr>
+          <p:nvPr>
+            <p:ph type="body" idx="1"/>
+          </p:nvPr>
+        </p:nvSpPr>
+        <p:spPr/>
+        <p:txBody>
+          <a:bodyPr xmlns:a="http://schemas.openxmlformats.org/drawingml/2006/main"/>
+          <a:lstStyle xmlns:a="http://schemas.openxmlformats.org/drawingml/2006/main"/>
+          <a:p xmlns:a="http://schemas.openxmlformats.org/drawingml/2006/main">
+            <a:r>
+              <a:t>Student reading: CollectionView data. https://learn.microsoft.com/dotnet/maui/user-interface/controls/collectionview/populate-data</a:t>
             </a:r>
           </a:p>
         </p:txBody>
@@ -1073,7 +1286,7 @@
           <a:lstStyle xmlns:a="http://schemas.openxmlformats.org/drawingml/2006/main"/>
           <a:p xmlns:a="http://schemas.openxmlformats.org/drawingml/2006/main">
             <a:r>
-              <a:t>Explain the work for Module 2. Show the expected app result before students start. Source: Module 2 Word tutorial.</a:t>
+              <a:t>Give students the outcome before they start. Source: Module 2 Word tutorial.</a:t>
             </a:r>
           </a:p>
         </p:txBody>
@@ -1143,7 +1356,7 @@
           <a:lstStyle xmlns:a="http://schemas.openxmlformats.org/drawingml/2006/main"/>
           <a:p xmlns:a="http://schemas.openxmlformats.org/drawingml/2006/main">
             <a:r>
-              <a:t>Before tutorial Step 2: explain these concepts. Ask students to predict what the change will do. Then open Step 2 in the Word tutorial. Source: Module 2 Word tutorial.</a:t>
+              <a:t>Explain the framework idea before the first exercise step. MAUI documentation: https://learn.microsoft.com/dotnet/maui/user-interface/controls/collectionview/populate-data</a:t>
             </a:r>
           </a:p>
         </p:txBody>
@@ -1213,7 +1426,7 @@
           <a:lstStyle xmlns:a="http://schemas.openxmlformats.org/drawingml/2006/main"/>
           <a:p xmlns:a="http://schemas.openxmlformats.org/drawingml/2006/main">
             <a:r>
-              <a:t>After tutorial Step 2: run the app or inspect the code. Ask students to explain the observed result. Source: Module 2 Word tutorial.</a:t>
+              <a:t>Ask students to identify the C# object, the XAML control, and the connection between them. Source: Module 2 Word tutorial. MAUI documentation: https://learn.microsoft.com/dotnet/maui/user-interface/controls/collectionview/populate-data</a:t>
             </a:r>
           </a:p>
         </p:txBody>
@@ -1283,7 +1496,7 @@
           <a:lstStyle xmlns:a="http://schemas.openxmlformats.org/drawingml/2006/main"/>
           <a:p xmlns:a="http://schemas.openxmlformats.org/drawingml/2006/main">
             <a:r>
-              <a:t>Before tutorial Step 6: explain these concepts. Ask students to predict what the change will do. Then open Step 6 in the Word tutorial. Source: Module 2 Word tutorial.</a:t>
+              <a:t>Before tutorial Step 2: explain these concepts. Ask students to predict what the change will do. Then open Step 2 in the Word tutorial. Source: Module 2 Word tutorial. Related MAUI documentation: https://learn.microsoft.com/dotnet/maui/user-interface/controls/collectionview/populate-data</a:t>
             </a:r>
           </a:p>
         </p:txBody>
@@ -1353,7 +1566,7 @@
           <a:lstStyle xmlns:a="http://schemas.openxmlformats.org/drawingml/2006/main"/>
           <a:p xmlns:a="http://schemas.openxmlformats.org/drawingml/2006/main">
             <a:r>
-              <a:t>After tutorial Step 6: run the app or inspect the code. Ask students to explain the observed result. Source: Module 2 Word tutorial.</a:t>
+              <a:t>After tutorial Step 2: run the app or inspect the code. Ask students to explain the observed result. Source: Module 2 Word tutorial.</a:t>
             </a:r>
           </a:p>
         </p:txBody>
@@ -1423,7 +1636,7 @@
           <a:lstStyle xmlns:a="http://schemas.openxmlformats.org/drawingml/2006/main"/>
           <a:p xmlns:a="http://schemas.openxmlformats.org/drawingml/2006/main">
             <a:r>
-              <a:t>Before tutorial Step 7: explain these concepts. Ask students to predict what the change will do. Then open Step 7 in the Word tutorial. Source: Module 2 Word tutorial.</a:t>
+              <a:t>Before tutorial Step 6: explain these concepts. Ask students to predict what the change will do. Then open Step 6 in the Word tutorial. Source: Module 2 Word tutorial. Related MAUI documentation: https://learn.microsoft.com/dotnet/maui/user-interface/controls/collectionview/populate-data</a:t>
             </a:r>
           </a:p>
         </p:txBody>
@@ -1493,7 +1706,7 @@
           <a:lstStyle xmlns:a="http://schemas.openxmlformats.org/drawingml/2006/main"/>
           <a:p xmlns:a="http://schemas.openxmlformats.org/drawingml/2006/main">
             <a:r>
-              <a:t>After tutorial Step 7: run the app or inspect the code. Ask students to explain the observed result. Source: Module 2 Word tutorial.</a:t>
+              <a:t>After tutorial Step 6: run the app or inspect the code. Ask students to explain the observed result. Source: Module 2 Word tutorial.</a:t>
             </a:r>
           </a:p>
         </p:txBody>
@@ -1563,7 +1776,7 @@
           <a:lstStyle xmlns:a="http://schemas.openxmlformats.org/drawingml/2006/main"/>
           <a:p xmlns:a="http://schemas.openxmlformats.org/drawingml/2006/main">
             <a:r>
-              <a:t>Before tutorial Step 8: explain these concepts. Ask students to predict what the change will do. Then open Step 8 in the Word tutorial. Source: Module 2 Word tutorial.</a:t>
+              <a:t>Before tutorial Step 7: explain these concepts. Ask students to predict what the change will do. Then open Step 7 in the Word tutorial. Source: Module 2 Word tutorial. Related MAUI documentation: https://learn.microsoft.com/dotnet/maui/user-interface/controls/collectionview/populate-data</a:t>
             </a:r>
           </a:p>
         </p:txBody>
@@ -1673,7 +1886,7 @@
           <p:cNvPr id="14" name="Picture 13">
             <a:extLst xmlns:a="http://schemas.openxmlformats.org/drawingml/2006/main">
               <a:ext uri="{FF2B5EF4-FFF2-40B4-BE49-F238E27FC236}">
-                <a16:creationId xmlns:a16="http://schemas.microsoft.com/office/drawing/2014/main" id="{ABB65F2C-887D-4FDB-B994-11981E805750}"/>
+                <a16:creationId xmlns:a16="http://schemas.microsoft.com/office/drawing/2014/main" id="{0154CFB1-3B67-4D50-B44E-8221F555EEBB}"/>
               </a:ext>
             </a:extLst>
           </p:cNvPr>
@@ -1683,7 +1896,7 @@
           <p:nvPr/>
         </p:nvPicPr>
         <p:blipFill>
-          <a:blip xmlns:r="http://schemas.openxmlformats.org/officeDocument/2006/relationships" xmlns:a="http://schemas.openxmlformats.org/drawingml/2006/main" r:embed="R13b0d6a57a6a49f2">
+          <a:blip xmlns:r="http://schemas.openxmlformats.org/officeDocument/2006/relationships" xmlns:a="http://schemas.openxmlformats.org/drawingml/2006/main" r:embed="R6e79911b22334ba4">
             <a:alphaModFix amt="40000"/>
           </a:blip>
           <a:stretch xmlns:a="http://schemas.openxmlformats.org/drawingml/2006/main">
@@ -1846,7 +2059,7 @@
           <p:cNvPr id="2" name="Title 1">
             <a:extLst xmlns:a="http://schemas.openxmlformats.org/drawingml/2006/main">
               <a:ext uri="{FF2B5EF4-FFF2-40B4-BE49-F238E27FC236}">
-                <a16:creationId xmlns:a16="http://schemas.microsoft.com/office/drawing/2014/main" id="{98102847-DC40-43F9-8D48-543C51E906CA}"/>
+                <a16:creationId xmlns:a16="http://schemas.microsoft.com/office/drawing/2014/main" id="{D01E422F-34E4-440A-9315-F77E6AE4D5CD}"/>
               </a:ext>
             </a:extLst>
           </p:cNvPr>
@@ -1893,7 +2106,7 @@
           <p:cNvPr id="3" name="Subtitle 2">
             <a:extLst xmlns:a="http://schemas.openxmlformats.org/drawingml/2006/main">
               <a:ext uri="{FF2B5EF4-FFF2-40B4-BE49-F238E27FC236}">
-                <a16:creationId xmlns:a16="http://schemas.microsoft.com/office/drawing/2014/main" id="{DB431877-032C-42D8-8C5C-9E14A2576DBF}"/>
+                <a16:creationId xmlns:a16="http://schemas.microsoft.com/office/drawing/2014/main" id="{8511FCE7-D64F-40FC-AE08-CF4B996C0E2C}"/>
               </a:ext>
             </a:extLst>
           </p:cNvPr>
@@ -2021,7 +2234,7 @@
           <p:cNvPr id="4" name="Date Placeholder 3">
             <a:extLst xmlns:a="http://schemas.openxmlformats.org/drawingml/2006/main">
               <a:ext uri="{FF2B5EF4-FFF2-40B4-BE49-F238E27FC236}">
-                <a16:creationId xmlns:a16="http://schemas.microsoft.com/office/drawing/2014/main" id="{ADC8E09B-4FCB-4096-8446-61BE99B35C95}"/>
+                <a16:creationId xmlns:a16="http://schemas.microsoft.com/office/drawing/2014/main" id="{54FC5DC4-11AF-472E-AA35-ED0AA8CDCE31}"/>
               </a:ext>
             </a:extLst>
           </p:cNvPr>
@@ -2049,7 +2262,7 @@
           <p:cNvPr id="5" name="Footer Placeholder 4">
             <a:extLst xmlns:a="http://schemas.openxmlformats.org/drawingml/2006/main">
               <a:ext uri="{FF2B5EF4-FFF2-40B4-BE49-F238E27FC236}">
-                <a16:creationId xmlns:a16="http://schemas.microsoft.com/office/drawing/2014/main" id="{EF3935CE-53F8-4D9A-9ECC-61A85C5C6D3B}"/>
+                <a16:creationId xmlns:a16="http://schemas.microsoft.com/office/drawing/2014/main" id="{0CDC9706-794E-41BA-B473-4F5C7C10E9FA}"/>
               </a:ext>
             </a:extLst>
           </p:cNvPr>
@@ -2074,7 +2287,7 @@
           <p:cNvPr id="6" name="Slide Number Placeholder 5">
             <a:extLst xmlns:a="http://schemas.openxmlformats.org/drawingml/2006/main">
               <a:ext uri="{FF2B5EF4-FFF2-40B4-BE49-F238E27FC236}">
-                <a16:creationId xmlns:a16="http://schemas.microsoft.com/office/drawing/2014/main" id="{879720C5-F712-4F7E-84AF-1F321ADAB86F}"/>
+                <a16:creationId xmlns:a16="http://schemas.microsoft.com/office/drawing/2014/main" id="{B9AB7728-9C08-4DC9-BD5E-8B1F5B0C4EA0}"/>
               </a:ext>
             </a:extLst>
           </p:cNvPr>
@@ -2173,7 +2386,7 @@
           <p:cNvPr id="2" name="Title 1">
             <a:extLst xmlns:a="http://schemas.openxmlformats.org/drawingml/2006/main">
               <a:ext uri="{FF2B5EF4-FFF2-40B4-BE49-F238E27FC236}">
-                <a16:creationId xmlns:a16="http://schemas.microsoft.com/office/drawing/2014/main" id="{28176113-0076-42BC-A9F8-DAEE9902C2F6}"/>
+                <a16:creationId xmlns:a16="http://schemas.microsoft.com/office/drawing/2014/main" id="{1DBFF067-09FA-4D02-8EFB-1C66B914B238}"/>
               </a:ext>
             </a:extLst>
           </p:cNvPr>
@@ -2200,7 +2413,7 @@
           <p:cNvPr id="3" name="Vertical Text Placeholder 2">
             <a:extLst xmlns:a="http://schemas.openxmlformats.org/drawingml/2006/main">
               <a:ext uri="{FF2B5EF4-FFF2-40B4-BE49-F238E27FC236}">
-                <a16:creationId xmlns:a16="http://schemas.microsoft.com/office/drawing/2014/main" id="{4DDC0965-E05D-4F49-97D8-121D4009D12F}"/>
+                <a16:creationId xmlns:a16="http://schemas.microsoft.com/office/drawing/2014/main" id="{7357C7E6-1622-487E-B0FF-88DE8E745388}"/>
               </a:ext>
             </a:extLst>
           </p:cNvPr>
@@ -2262,7 +2475,7 @@
           <p:cNvPr id="4" name="Date Placeholder 3">
             <a:extLst xmlns:a="http://schemas.openxmlformats.org/drawingml/2006/main">
               <a:ext uri="{FF2B5EF4-FFF2-40B4-BE49-F238E27FC236}">
-                <a16:creationId xmlns:a16="http://schemas.microsoft.com/office/drawing/2014/main" id="{56758775-3B2B-4EBB-B8AF-6A1378A85254}"/>
+                <a16:creationId xmlns:a16="http://schemas.microsoft.com/office/drawing/2014/main" id="{8CA294E1-5992-4A24-A9CE-4CBA95D23DAD}"/>
               </a:ext>
             </a:extLst>
           </p:cNvPr>
@@ -2290,7 +2503,7 @@
           <p:cNvPr id="5" name="Footer Placeholder 4">
             <a:extLst xmlns:a="http://schemas.openxmlformats.org/drawingml/2006/main">
               <a:ext uri="{FF2B5EF4-FFF2-40B4-BE49-F238E27FC236}">
-                <a16:creationId xmlns:a16="http://schemas.microsoft.com/office/drawing/2014/main" id="{29F89D42-215B-4630-A8A5-8E238038CEE4}"/>
+                <a16:creationId xmlns:a16="http://schemas.microsoft.com/office/drawing/2014/main" id="{2143102C-27A2-4051-86C1-6532534FB69C}"/>
               </a:ext>
             </a:extLst>
           </p:cNvPr>
@@ -2315,7 +2528,7 @@
           <p:cNvPr id="6" name="Slide Number Placeholder 5">
             <a:extLst xmlns:a="http://schemas.openxmlformats.org/drawingml/2006/main">
               <a:ext uri="{FF2B5EF4-FFF2-40B4-BE49-F238E27FC236}">
-                <a16:creationId xmlns:a16="http://schemas.microsoft.com/office/drawing/2014/main" id="{AC955085-71C1-4CFA-A73B-28A622B9B7C2}"/>
+                <a16:creationId xmlns:a16="http://schemas.microsoft.com/office/drawing/2014/main" id="{12B70031-BD7C-4440-893E-00D50A595CED}"/>
               </a:ext>
             </a:extLst>
           </p:cNvPr>
@@ -2360,7 +2573,7 @@
           <p:cNvPr id="2" name="Vertical Title 1">
             <a:extLst xmlns:a="http://schemas.openxmlformats.org/drawingml/2006/main">
               <a:ext uri="{FF2B5EF4-FFF2-40B4-BE49-F238E27FC236}">
-                <a16:creationId xmlns:a16="http://schemas.microsoft.com/office/drawing/2014/main" id="{B67777CC-5781-405B-A9A3-B3D0F9626E40}"/>
+                <a16:creationId xmlns:a16="http://schemas.microsoft.com/office/drawing/2014/main" id="{F5C5D878-7FE2-42AB-A15B-5816729FFC2E}"/>
               </a:ext>
             </a:extLst>
           </p:cNvPr>
@@ -2392,7 +2605,7 @@
           <p:cNvPr id="3" name="Vertical Text Placeholder 2">
             <a:extLst xmlns:a="http://schemas.openxmlformats.org/drawingml/2006/main">
               <a:ext uri="{FF2B5EF4-FFF2-40B4-BE49-F238E27FC236}">
-                <a16:creationId xmlns:a16="http://schemas.microsoft.com/office/drawing/2014/main" id="{70BF8500-D28E-4C89-BDAD-6AC5846345C5}"/>
+                <a16:creationId xmlns:a16="http://schemas.microsoft.com/office/drawing/2014/main" id="{12B39076-36E4-4002-B874-37AED429226F}"/>
               </a:ext>
             </a:extLst>
           </p:cNvPr>
@@ -2459,7 +2672,7 @@
           <p:cNvPr id="4" name="Date Placeholder 3">
             <a:extLst xmlns:a="http://schemas.openxmlformats.org/drawingml/2006/main">
               <a:ext uri="{FF2B5EF4-FFF2-40B4-BE49-F238E27FC236}">
-                <a16:creationId xmlns:a16="http://schemas.microsoft.com/office/drawing/2014/main" id="{5263F9FB-8970-4E40-AD6E-88A63C0F14F1}"/>
+                <a16:creationId xmlns:a16="http://schemas.microsoft.com/office/drawing/2014/main" id="{57DC367D-EA9E-484E-9BA7-8CF673D9D365}"/>
               </a:ext>
             </a:extLst>
           </p:cNvPr>
@@ -2487,7 +2700,7 @@
           <p:cNvPr id="5" name="Footer Placeholder 4">
             <a:extLst xmlns:a="http://schemas.openxmlformats.org/drawingml/2006/main">
               <a:ext uri="{FF2B5EF4-FFF2-40B4-BE49-F238E27FC236}">
-                <a16:creationId xmlns:a16="http://schemas.microsoft.com/office/drawing/2014/main" id="{67B1F10A-2711-418B-BE59-39BDE8E514C5}"/>
+                <a16:creationId xmlns:a16="http://schemas.microsoft.com/office/drawing/2014/main" id="{C0127B75-0434-422E-A36C-3AA2F49979D5}"/>
               </a:ext>
             </a:extLst>
           </p:cNvPr>
@@ -2512,7 +2725,7 @@
           <p:cNvPr id="6" name="Slide Number Placeholder 5">
             <a:extLst xmlns:a="http://schemas.openxmlformats.org/drawingml/2006/main">
               <a:ext uri="{FF2B5EF4-FFF2-40B4-BE49-F238E27FC236}">
-                <a16:creationId xmlns:a16="http://schemas.microsoft.com/office/drawing/2014/main" id="{F695943D-9D47-4F9C-B67A-0FCC608D0ACE}"/>
+                <a16:creationId xmlns:a16="http://schemas.microsoft.com/office/drawing/2014/main" id="{4E7E353D-B1A6-45EC-AD13-4C999E6F405B}"/>
               </a:ext>
             </a:extLst>
           </p:cNvPr>
@@ -2557,7 +2770,7 @@
           <p:cNvPr id="3" name="Content Placeholder 2">
             <a:extLst xmlns:a="http://schemas.openxmlformats.org/drawingml/2006/main">
               <a:ext uri="{FF2B5EF4-FFF2-40B4-BE49-F238E27FC236}">
-                <a16:creationId xmlns:a16="http://schemas.microsoft.com/office/drawing/2014/main" id="{050F9D49-FF46-4370-8009-A0C19AC1871E}"/>
+                <a16:creationId xmlns:a16="http://schemas.microsoft.com/office/drawing/2014/main" id="{EF3EF742-A661-455F-A6FD-01ECF646B2CB}"/>
               </a:ext>
             </a:extLst>
           </p:cNvPr>
@@ -2620,7 +2833,7 @@
           <p:cNvPr id="4" name="Date Placeholder 3">
             <a:extLst xmlns:a="http://schemas.openxmlformats.org/drawingml/2006/main">
               <a:ext uri="{FF2B5EF4-FFF2-40B4-BE49-F238E27FC236}">
-                <a16:creationId xmlns:a16="http://schemas.microsoft.com/office/drawing/2014/main" id="{3F72B857-BE00-4C47-8B02-F86DFB17A50A}"/>
+                <a16:creationId xmlns:a16="http://schemas.microsoft.com/office/drawing/2014/main" id="{9A53A608-BBC4-4701-A2F0-003A0B388A24}"/>
               </a:ext>
             </a:extLst>
           </p:cNvPr>
@@ -2648,7 +2861,7 @@
           <p:cNvPr id="5" name="Footer Placeholder 4">
             <a:extLst xmlns:a="http://schemas.openxmlformats.org/drawingml/2006/main">
               <a:ext uri="{FF2B5EF4-FFF2-40B4-BE49-F238E27FC236}">
-                <a16:creationId xmlns:a16="http://schemas.microsoft.com/office/drawing/2014/main" id="{4ED4F897-6F62-44CB-9377-7A94A49A10CD}"/>
+                <a16:creationId xmlns:a16="http://schemas.microsoft.com/office/drawing/2014/main" id="{AC8A1032-DC72-450C-AA12-B325DF79EFE9}"/>
               </a:ext>
             </a:extLst>
           </p:cNvPr>
@@ -2673,7 +2886,7 @@
           <p:cNvPr id="6" name="Slide Number Placeholder 5">
             <a:extLst xmlns:a="http://schemas.openxmlformats.org/drawingml/2006/main">
               <a:ext uri="{FF2B5EF4-FFF2-40B4-BE49-F238E27FC236}">
-                <a16:creationId xmlns:a16="http://schemas.microsoft.com/office/drawing/2014/main" id="{25495788-BF4F-4420-B388-8FCACE5DF59B}"/>
+                <a16:creationId xmlns:a16="http://schemas.microsoft.com/office/drawing/2014/main" id="{C40A97F1-428B-4036-9A6A-DFE81A2D14DD}"/>
               </a:ext>
             </a:extLst>
           </p:cNvPr>
@@ -2761,7 +2974,7 @@
           <p:cNvPr id="2" name="Title 1">
             <a:extLst xmlns:a="http://schemas.openxmlformats.org/drawingml/2006/main">
               <a:ext uri="{FF2B5EF4-FFF2-40B4-BE49-F238E27FC236}">
-                <a16:creationId xmlns:a16="http://schemas.microsoft.com/office/drawing/2014/main" id="{851BD9C0-8126-4D01-8A6B-E42063DD0674}"/>
+                <a16:creationId xmlns:a16="http://schemas.microsoft.com/office/drawing/2014/main" id="{1BBAF86D-D2B6-4302-8505-C64C66BC096F}"/>
               </a:ext>
             </a:extLst>
           </p:cNvPr>
@@ -2799,7 +3012,7 @@
           <p:cNvPr id="3" name="Text Placeholder 2">
             <a:extLst xmlns:a="http://schemas.openxmlformats.org/drawingml/2006/main">
               <a:ext uri="{FF2B5EF4-FFF2-40B4-BE49-F238E27FC236}">
-                <a16:creationId xmlns:a16="http://schemas.microsoft.com/office/drawing/2014/main" id="{DEBC13FF-30A6-4BE0-B329-F3691BFE1182}"/>
+                <a16:creationId xmlns:a16="http://schemas.microsoft.com/office/drawing/2014/main" id="{890E5C83-122A-4946-8428-1A9981B405D8}"/>
               </a:ext>
             </a:extLst>
           </p:cNvPr>
@@ -2925,7 +3138,7 @@
           <p:cNvPr id="4" name="Date Placeholder 3">
             <a:extLst xmlns:a="http://schemas.openxmlformats.org/drawingml/2006/main">
               <a:ext uri="{FF2B5EF4-FFF2-40B4-BE49-F238E27FC236}">
-                <a16:creationId xmlns:a16="http://schemas.microsoft.com/office/drawing/2014/main" id="{2605C832-9EEA-40DC-BF37-14C57AFE5D5A}"/>
+                <a16:creationId xmlns:a16="http://schemas.microsoft.com/office/drawing/2014/main" id="{CFF883CF-32F8-45E0-8990-CA14A53E235E}"/>
               </a:ext>
             </a:extLst>
           </p:cNvPr>
@@ -2953,7 +3166,7 @@
           <p:cNvPr id="5" name="Footer Placeholder 4">
             <a:extLst xmlns:a="http://schemas.openxmlformats.org/drawingml/2006/main">
               <a:ext uri="{FF2B5EF4-FFF2-40B4-BE49-F238E27FC236}">
-                <a16:creationId xmlns:a16="http://schemas.microsoft.com/office/drawing/2014/main" id="{B3A69E5D-68ED-4071-B2A0-8A9A93FBD590}"/>
+                <a16:creationId xmlns:a16="http://schemas.microsoft.com/office/drawing/2014/main" id="{2DAC4797-6A62-43F9-B120-A0D55FE7F8FA}"/>
               </a:ext>
             </a:extLst>
           </p:cNvPr>
@@ -2978,7 +3191,7 @@
           <p:cNvPr id="6" name="Slide Number Placeholder 5">
             <a:extLst xmlns:a="http://schemas.openxmlformats.org/drawingml/2006/main">
               <a:ext uri="{FF2B5EF4-FFF2-40B4-BE49-F238E27FC236}">
-                <a16:creationId xmlns:a16="http://schemas.microsoft.com/office/drawing/2014/main" id="{EAAACBA6-DE38-438E-BD85-1BEA8C3D836C}"/>
+                <a16:creationId xmlns:a16="http://schemas.microsoft.com/office/drawing/2014/main" id="{3E23E514-56BA-4972-96F1-3FD9F64D6B6D}"/>
               </a:ext>
             </a:extLst>
           </p:cNvPr>
@@ -3023,7 +3236,7 @@
           <p:cNvPr id="2" name="Title 1">
             <a:extLst xmlns:a="http://schemas.openxmlformats.org/drawingml/2006/main">
               <a:ext uri="{FF2B5EF4-FFF2-40B4-BE49-F238E27FC236}">
-                <a16:creationId xmlns:a16="http://schemas.microsoft.com/office/drawing/2014/main" id="{2DE91EAC-D927-430E-9003-0BA369ECAD6E}"/>
+                <a16:creationId xmlns:a16="http://schemas.microsoft.com/office/drawing/2014/main" id="{FE2B7EF3-5D29-43EA-924C-6C6862F08FAF}"/>
               </a:ext>
             </a:extLst>
           </p:cNvPr>
@@ -3050,7 +3263,7 @@
           <p:cNvPr id="3" name="Content Placeholder 2">
             <a:extLst xmlns:a="http://schemas.openxmlformats.org/drawingml/2006/main">
               <a:ext uri="{FF2B5EF4-FFF2-40B4-BE49-F238E27FC236}">
-                <a16:creationId xmlns:a16="http://schemas.microsoft.com/office/drawing/2014/main" id="{DC159258-9BF8-4F67-AC8D-295F4FEE8D83}"/>
+                <a16:creationId xmlns:a16="http://schemas.microsoft.com/office/drawing/2014/main" id="{68F2D46C-2F65-4F56-8D98-32B6A28D74A8}"/>
               </a:ext>
             </a:extLst>
           </p:cNvPr>
@@ -3155,7 +3368,7 @@
           <p:cNvPr id="4" name="Content Placeholder 3">
             <a:extLst xmlns:a="http://schemas.openxmlformats.org/drawingml/2006/main">
               <a:ext uri="{FF2B5EF4-FFF2-40B4-BE49-F238E27FC236}">
-                <a16:creationId xmlns:a16="http://schemas.microsoft.com/office/drawing/2014/main" id="{7C179529-D3E0-4F35-B9EE-EBFC8C142629}"/>
+                <a16:creationId xmlns:a16="http://schemas.microsoft.com/office/drawing/2014/main" id="{82C35812-5680-4774-B908-01DF44BD4FDD}"/>
               </a:ext>
             </a:extLst>
           </p:cNvPr>
@@ -3260,7 +3473,7 @@
           <p:cNvPr id="5" name="Date Placeholder 4">
             <a:extLst xmlns:a="http://schemas.openxmlformats.org/drawingml/2006/main">
               <a:ext uri="{FF2B5EF4-FFF2-40B4-BE49-F238E27FC236}">
-                <a16:creationId xmlns:a16="http://schemas.microsoft.com/office/drawing/2014/main" id="{510B27F0-FEDA-4FDC-AFC9-FE5899397F33}"/>
+                <a16:creationId xmlns:a16="http://schemas.microsoft.com/office/drawing/2014/main" id="{88389A56-D891-4D8D-88EE-737328F5886E}"/>
               </a:ext>
             </a:extLst>
           </p:cNvPr>
@@ -3288,7 +3501,7 @@
           <p:cNvPr id="6" name="Footer Placeholder 5">
             <a:extLst xmlns:a="http://schemas.openxmlformats.org/drawingml/2006/main">
               <a:ext uri="{FF2B5EF4-FFF2-40B4-BE49-F238E27FC236}">
-                <a16:creationId xmlns:a16="http://schemas.microsoft.com/office/drawing/2014/main" id="{B4BC8B4D-48A2-449D-901F-853E49D8C54D}"/>
+                <a16:creationId xmlns:a16="http://schemas.microsoft.com/office/drawing/2014/main" id="{662937B3-902A-4FBF-9745-4076F1212289}"/>
               </a:ext>
             </a:extLst>
           </p:cNvPr>
@@ -3313,7 +3526,7 @@
           <p:cNvPr id="7" name="Slide Number Placeholder 6">
             <a:extLst xmlns:a="http://schemas.openxmlformats.org/drawingml/2006/main">
               <a:ext uri="{FF2B5EF4-FFF2-40B4-BE49-F238E27FC236}">
-                <a16:creationId xmlns:a16="http://schemas.microsoft.com/office/drawing/2014/main" id="{B29E83B9-D7F6-4945-8C41-39A6AD5DF4F4}"/>
+                <a16:creationId xmlns:a16="http://schemas.microsoft.com/office/drawing/2014/main" id="{AE2CE327-8DCE-4230-B7C7-D181EDC9612F}"/>
               </a:ext>
             </a:extLst>
           </p:cNvPr>
@@ -3358,7 +3571,7 @@
           <p:cNvPr id="2" name="Title 1">
             <a:extLst xmlns:a="http://schemas.openxmlformats.org/drawingml/2006/main">
               <a:ext uri="{FF2B5EF4-FFF2-40B4-BE49-F238E27FC236}">
-                <a16:creationId xmlns:a16="http://schemas.microsoft.com/office/drawing/2014/main" id="{E47E18D8-C117-400E-A8CB-2C0AD0303A60}"/>
+                <a16:creationId xmlns:a16="http://schemas.microsoft.com/office/drawing/2014/main" id="{78153347-FCB7-41B2-9835-3580B6872DFA}"/>
               </a:ext>
             </a:extLst>
           </p:cNvPr>
@@ -3390,7 +3603,7 @@
           <p:cNvPr id="3" name="Text Placeholder 2">
             <a:extLst xmlns:a="http://schemas.openxmlformats.org/drawingml/2006/main">
               <a:ext uri="{FF2B5EF4-FFF2-40B4-BE49-F238E27FC236}">
-                <a16:creationId xmlns:a16="http://schemas.microsoft.com/office/drawing/2014/main" id="{46D0B2CA-B0C7-4DB8-A834-D2D79B4B7628}"/>
+                <a16:creationId xmlns:a16="http://schemas.microsoft.com/office/drawing/2014/main" id="{C5CCFFEA-4F37-48C8-A9AC-258F78895F9D}"/>
               </a:ext>
             </a:extLst>
           </p:cNvPr>
@@ -3462,7 +3675,7 @@
           <p:cNvPr id="4" name="Content Placeholder 3">
             <a:extLst xmlns:a="http://schemas.openxmlformats.org/drawingml/2006/main">
               <a:ext uri="{FF2B5EF4-FFF2-40B4-BE49-F238E27FC236}">
-                <a16:creationId xmlns:a16="http://schemas.microsoft.com/office/drawing/2014/main" id="{12F3C7EE-9364-4454-8307-018CFA194F8D}"/>
+                <a16:creationId xmlns:a16="http://schemas.microsoft.com/office/drawing/2014/main" id="{07FE1335-D503-46A0-8B15-E9BB546975C9}"/>
               </a:ext>
             </a:extLst>
           </p:cNvPr>
@@ -3566,7 +3779,7 @@
           <p:cNvPr id="5" name="Text Placeholder 4">
             <a:extLst xmlns:a="http://schemas.openxmlformats.org/drawingml/2006/main">
               <a:ext uri="{FF2B5EF4-FFF2-40B4-BE49-F238E27FC236}">
-                <a16:creationId xmlns:a16="http://schemas.microsoft.com/office/drawing/2014/main" id="{D85CA799-5E3E-4A6B-9E5A-E4A69683F818}"/>
+                <a16:creationId xmlns:a16="http://schemas.microsoft.com/office/drawing/2014/main" id="{23E9A69B-61C6-41EA-8682-34C7AC36B556}"/>
               </a:ext>
             </a:extLst>
           </p:cNvPr>
@@ -3638,7 +3851,7 @@
           <p:cNvPr id="6" name="Content Placeholder 5">
             <a:extLst xmlns:a="http://schemas.openxmlformats.org/drawingml/2006/main">
               <a:ext uri="{FF2B5EF4-FFF2-40B4-BE49-F238E27FC236}">
-                <a16:creationId xmlns:a16="http://schemas.microsoft.com/office/drawing/2014/main" id="{BC633A81-D44D-4B7C-9C0C-67F7811722B2}"/>
+                <a16:creationId xmlns:a16="http://schemas.microsoft.com/office/drawing/2014/main" id="{38343C73-811A-4BC0-BF92-90CA97AAFB7A}"/>
               </a:ext>
             </a:extLst>
           </p:cNvPr>
@@ -3742,7 +3955,7 @@
           <p:cNvPr id="7" name="Date Placeholder 6">
             <a:extLst xmlns:a="http://schemas.openxmlformats.org/drawingml/2006/main">
               <a:ext uri="{FF2B5EF4-FFF2-40B4-BE49-F238E27FC236}">
-                <a16:creationId xmlns:a16="http://schemas.microsoft.com/office/drawing/2014/main" id="{712EECE7-6A12-4D47-9CFB-061F598A2C4E}"/>
+                <a16:creationId xmlns:a16="http://schemas.microsoft.com/office/drawing/2014/main" id="{2064EE46-0E9C-4393-8EB5-281C3FBA46CE}"/>
               </a:ext>
             </a:extLst>
           </p:cNvPr>
@@ -3770,7 +3983,7 @@
           <p:cNvPr id="8" name="Footer Placeholder 7">
             <a:extLst xmlns:a="http://schemas.openxmlformats.org/drawingml/2006/main">
               <a:ext uri="{FF2B5EF4-FFF2-40B4-BE49-F238E27FC236}">
-                <a16:creationId xmlns:a16="http://schemas.microsoft.com/office/drawing/2014/main" id="{26FA907B-9FB1-47DD-B845-045E2753D0B6}"/>
+                <a16:creationId xmlns:a16="http://schemas.microsoft.com/office/drawing/2014/main" id="{018A65BC-0C79-4199-B865-FBB771FE42AF}"/>
               </a:ext>
             </a:extLst>
           </p:cNvPr>
@@ -3795,7 +4008,7 @@
           <p:cNvPr id="9" name="Slide Number Placeholder 8">
             <a:extLst xmlns:a="http://schemas.openxmlformats.org/drawingml/2006/main">
               <a:ext uri="{FF2B5EF4-FFF2-40B4-BE49-F238E27FC236}">
-                <a16:creationId xmlns:a16="http://schemas.microsoft.com/office/drawing/2014/main" id="{6F30463F-87AC-4F1F-978D-9A726A9B62D4}"/>
+                <a16:creationId xmlns:a16="http://schemas.microsoft.com/office/drawing/2014/main" id="{6B4BDEB5-D262-4360-B0D7-B518BF5A9EB8}"/>
               </a:ext>
             </a:extLst>
           </p:cNvPr>
@@ -3840,7 +4053,7 @@
           <p:cNvPr id="2" name="Title 1">
             <a:extLst xmlns:a="http://schemas.openxmlformats.org/drawingml/2006/main">
               <a:ext uri="{FF2B5EF4-FFF2-40B4-BE49-F238E27FC236}">
-                <a16:creationId xmlns:a16="http://schemas.microsoft.com/office/drawing/2014/main" id="{3DA3F344-9882-4F28-84AF-207B4F5B40FF}"/>
+                <a16:creationId xmlns:a16="http://schemas.microsoft.com/office/drawing/2014/main" id="{825235A4-246E-42CA-B611-B0C342A41136}"/>
               </a:ext>
             </a:extLst>
           </p:cNvPr>
@@ -3867,7 +4080,7 @@
           <p:cNvPr id="3" name="Date Placeholder 2">
             <a:extLst xmlns:a="http://schemas.openxmlformats.org/drawingml/2006/main">
               <a:ext uri="{FF2B5EF4-FFF2-40B4-BE49-F238E27FC236}">
-                <a16:creationId xmlns:a16="http://schemas.microsoft.com/office/drawing/2014/main" id="{CAFC79A2-EBDC-4624-9A31-0D491DBC077A}"/>
+                <a16:creationId xmlns:a16="http://schemas.microsoft.com/office/drawing/2014/main" id="{6460300A-D201-44D7-82D5-C3C2CCA267BC}"/>
               </a:ext>
             </a:extLst>
           </p:cNvPr>
@@ -3895,7 +4108,7 @@
           <p:cNvPr id="4" name="Footer Placeholder 3">
             <a:extLst xmlns:a="http://schemas.openxmlformats.org/drawingml/2006/main">
               <a:ext uri="{FF2B5EF4-FFF2-40B4-BE49-F238E27FC236}">
-                <a16:creationId xmlns:a16="http://schemas.microsoft.com/office/drawing/2014/main" id="{8768A900-EC80-4D54-9323-B8BFB5FD4771}"/>
+                <a16:creationId xmlns:a16="http://schemas.microsoft.com/office/drawing/2014/main" id="{C93C911D-C764-49F5-9CC7-19EF9E5E6097}"/>
               </a:ext>
             </a:extLst>
           </p:cNvPr>
@@ -3920,7 +4133,7 @@
           <p:cNvPr id="5" name="Slide Number Placeholder 4">
             <a:extLst xmlns:a="http://schemas.openxmlformats.org/drawingml/2006/main">
               <a:ext uri="{FF2B5EF4-FFF2-40B4-BE49-F238E27FC236}">
-                <a16:creationId xmlns:a16="http://schemas.microsoft.com/office/drawing/2014/main" id="{A9E66815-8D0D-41A5-8B54-7A67C487FDDE}"/>
+                <a16:creationId xmlns:a16="http://schemas.microsoft.com/office/drawing/2014/main" id="{EF7436DC-1A97-4B3B-8D27-5A55CCEE6FC9}"/>
               </a:ext>
             </a:extLst>
           </p:cNvPr>
@@ -3965,7 +4178,7 @@
           <p:cNvPr id="2" name="Date Placeholder 1">
             <a:extLst xmlns:a="http://schemas.openxmlformats.org/drawingml/2006/main">
               <a:ext uri="{FF2B5EF4-FFF2-40B4-BE49-F238E27FC236}">
-                <a16:creationId xmlns:a16="http://schemas.microsoft.com/office/drawing/2014/main" id="{B46555D5-7174-405C-80BF-8C6611C2B801}"/>
+                <a16:creationId xmlns:a16="http://schemas.microsoft.com/office/drawing/2014/main" id="{6EAB6F21-FB52-4AB1-990E-E3F3C9DB9E05}"/>
               </a:ext>
             </a:extLst>
           </p:cNvPr>
@@ -3993,7 +4206,7 @@
           <p:cNvPr id="3" name="Footer Placeholder 2">
             <a:extLst xmlns:a="http://schemas.openxmlformats.org/drawingml/2006/main">
               <a:ext uri="{FF2B5EF4-FFF2-40B4-BE49-F238E27FC236}">
-                <a16:creationId xmlns:a16="http://schemas.microsoft.com/office/drawing/2014/main" id="{580573B4-6EB7-4A4E-BB0B-A4D2D8F719D5}"/>
+                <a16:creationId xmlns:a16="http://schemas.microsoft.com/office/drawing/2014/main" id="{E8322107-167F-4D24-BEA8-84FDDAA0CAC6}"/>
               </a:ext>
             </a:extLst>
           </p:cNvPr>
@@ -4018,7 +4231,7 @@
           <p:cNvPr id="4" name="Slide Number Placeholder 3">
             <a:extLst xmlns:a="http://schemas.openxmlformats.org/drawingml/2006/main">
               <a:ext uri="{FF2B5EF4-FFF2-40B4-BE49-F238E27FC236}">
-                <a16:creationId xmlns:a16="http://schemas.microsoft.com/office/drawing/2014/main" id="{FDD45E18-6CA0-4D84-A38D-6405D9767EBE}"/>
+                <a16:creationId xmlns:a16="http://schemas.microsoft.com/office/drawing/2014/main" id="{F03D0FDB-04D9-4951-AFEC-8E8C7A3902DF}"/>
               </a:ext>
             </a:extLst>
           </p:cNvPr>
@@ -4063,7 +4276,7 @@
           <p:cNvPr id="2" name="Title 1">
             <a:extLst xmlns:a="http://schemas.openxmlformats.org/drawingml/2006/main">
               <a:ext uri="{FF2B5EF4-FFF2-40B4-BE49-F238E27FC236}">
-                <a16:creationId xmlns:a16="http://schemas.microsoft.com/office/drawing/2014/main" id="{DDDBF477-85EB-489B-B011-BD04AD7E8A18}"/>
+                <a16:creationId xmlns:a16="http://schemas.microsoft.com/office/drawing/2014/main" id="{A4268510-4237-445B-A00A-DDEEAEBD36A1}"/>
               </a:ext>
             </a:extLst>
           </p:cNvPr>
@@ -4100,7 +4313,7 @@
           <p:cNvPr id="3" name="Content Placeholder 2">
             <a:extLst xmlns:a="http://schemas.openxmlformats.org/drawingml/2006/main">
               <a:ext uri="{FF2B5EF4-FFF2-40B4-BE49-F238E27FC236}">
-                <a16:creationId xmlns:a16="http://schemas.microsoft.com/office/drawing/2014/main" id="{1EC81EA5-6177-41CB-9395-7D29036FABDA}"/>
+                <a16:creationId xmlns:a16="http://schemas.microsoft.com/office/drawing/2014/main" id="{86188276-CC06-4AD2-8711-F707BDBC2680}"/>
               </a:ext>
             </a:extLst>
           </p:cNvPr>
@@ -4204,7 +4417,7 @@
           <p:cNvPr id="4" name="Text Placeholder 3">
             <a:extLst xmlns:a="http://schemas.openxmlformats.org/drawingml/2006/main">
               <a:ext uri="{FF2B5EF4-FFF2-40B4-BE49-F238E27FC236}">
-                <a16:creationId xmlns:a16="http://schemas.microsoft.com/office/drawing/2014/main" id="{E4B31762-B764-4887-A248-8EF906A5E502}"/>
+                <a16:creationId xmlns:a16="http://schemas.microsoft.com/office/drawing/2014/main" id="{561186A6-1A90-4784-AECD-D2EFC50CF045}"/>
               </a:ext>
             </a:extLst>
           </p:cNvPr>
@@ -4276,7 +4489,7 @@
           <p:cNvPr id="5" name="Date Placeholder 4">
             <a:extLst xmlns:a="http://schemas.openxmlformats.org/drawingml/2006/main">
               <a:ext uri="{FF2B5EF4-FFF2-40B4-BE49-F238E27FC236}">
-                <a16:creationId xmlns:a16="http://schemas.microsoft.com/office/drawing/2014/main" id="{45C9D638-B432-4C2F-B084-901B4121BF67}"/>
+                <a16:creationId xmlns:a16="http://schemas.microsoft.com/office/drawing/2014/main" id="{BC474377-38C4-4C6C-86D0-B5AFEA215E6C}"/>
               </a:ext>
             </a:extLst>
           </p:cNvPr>
@@ -4304,7 +4517,7 @@
           <p:cNvPr id="6" name="Footer Placeholder 5">
             <a:extLst xmlns:a="http://schemas.openxmlformats.org/drawingml/2006/main">
               <a:ext uri="{FF2B5EF4-FFF2-40B4-BE49-F238E27FC236}">
-                <a16:creationId xmlns:a16="http://schemas.microsoft.com/office/drawing/2014/main" id="{493E2A36-681F-47D6-B4B5-7812C1A2FC4E}"/>
+                <a16:creationId xmlns:a16="http://schemas.microsoft.com/office/drawing/2014/main" id="{C8F3555F-F124-43DA-AB3B-908BE1523E72}"/>
               </a:ext>
             </a:extLst>
           </p:cNvPr>
@@ -4329,7 +4542,7 @@
           <p:cNvPr id="7" name="Slide Number Placeholder 6">
             <a:extLst xmlns:a="http://schemas.openxmlformats.org/drawingml/2006/main">
               <a:ext uri="{FF2B5EF4-FFF2-40B4-BE49-F238E27FC236}">
-                <a16:creationId xmlns:a16="http://schemas.microsoft.com/office/drawing/2014/main" id="{6124C9B4-CE5E-4338-8423-A0D8E03F0A11}"/>
+                <a16:creationId xmlns:a16="http://schemas.microsoft.com/office/drawing/2014/main" id="{5F4D7F80-49C1-45A0-9261-C3BB156D0E1B}"/>
               </a:ext>
             </a:extLst>
           </p:cNvPr>
@@ -4374,7 +4587,7 @@
           <p:cNvPr id="2" name="Title 1">
             <a:extLst xmlns:a="http://schemas.openxmlformats.org/drawingml/2006/main">
               <a:ext uri="{FF2B5EF4-FFF2-40B4-BE49-F238E27FC236}">
-                <a16:creationId xmlns:a16="http://schemas.microsoft.com/office/drawing/2014/main" id="{1A6E925B-1DAD-44E5-AB33-2DF7C1AA5AF9}"/>
+                <a16:creationId xmlns:a16="http://schemas.microsoft.com/office/drawing/2014/main" id="{9A4EF59A-AA8A-4E86-BF13-2930F1648249}"/>
               </a:ext>
             </a:extLst>
           </p:cNvPr>
@@ -4411,7 +4624,7 @@
           <p:cNvPr id="3" name="Picture Placeholder 2">
             <a:extLst xmlns:a="http://schemas.openxmlformats.org/drawingml/2006/main">
               <a:ext uri="{FF2B5EF4-FFF2-40B4-BE49-F238E27FC236}">
-                <a16:creationId xmlns:a16="http://schemas.microsoft.com/office/drawing/2014/main" id="{F8B683A0-111F-4C8A-A0E6-E554360B03D5}"/>
+                <a16:creationId xmlns:a16="http://schemas.microsoft.com/office/drawing/2014/main" id="{ED018565-9032-40B3-B182-E48057DD8BFC}"/>
               </a:ext>
             </a:extLst>
           </p:cNvPr>
@@ -4480,7 +4693,7 @@
           <p:cNvPr id="4" name="Text Placeholder 3">
             <a:extLst xmlns:a="http://schemas.openxmlformats.org/drawingml/2006/main">
               <a:ext uri="{FF2B5EF4-FFF2-40B4-BE49-F238E27FC236}">
-                <a16:creationId xmlns:a16="http://schemas.microsoft.com/office/drawing/2014/main" id="{EB76C1F6-0D68-441B-8BAA-7BA75DE9A30D}"/>
+                <a16:creationId xmlns:a16="http://schemas.microsoft.com/office/drawing/2014/main" id="{F4CF89B2-B614-43D9-BABD-5F4269EBD809}"/>
               </a:ext>
             </a:extLst>
           </p:cNvPr>
@@ -4552,7 +4765,7 @@
           <p:cNvPr id="5" name="Date Placeholder 4">
             <a:extLst xmlns:a="http://schemas.openxmlformats.org/drawingml/2006/main">
               <a:ext uri="{FF2B5EF4-FFF2-40B4-BE49-F238E27FC236}">
-                <a16:creationId xmlns:a16="http://schemas.microsoft.com/office/drawing/2014/main" id="{CE0C6F15-688A-4888-92B6-3FE33D3C9359}"/>
+                <a16:creationId xmlns:a16="http://schemas.microsoft.com/office/drawing/2014/main" id="{02EC341B-4FC8-4409-BA21-7AFFFC5AC92D}"/>
               </a:ext>
             </a:extLst>
           </p:cNvPr>
@@ -4580,7 +4793,7 @@
           <p:cNvPr id="6" name="Footer Placeholder 5">
             <a:extLst xmlns:a="http://schemas.openxmlformats.org/drawingml/2006/main">
               <a:ext uri="{FF2B5EF4-FFF2-40B4-BE49-F238E27FC236}">
-                <a16:creationId xmlns:a16="http://schemas.microsoft.com/office/drawing/2014/main" id="{04EC535C-D53C-4185-BBAB-46F3D43C2F75}"/>
+                <a16:creationId xmlns:a16="http://schemas.microsoft.com/office/drawing/2014/main" id="{CC9EC686-0525-457E-99EC-DB862BD4510C}"/>
               </a:ext>
             </a:extLst>
           </p:cNvPr>
@@ -4605,7 +4818,7 @@
           <p:cNvPr id="7" name="Slide Number Placeholder 6">
             <a:extLst xmlns:a="http://schemas.openxmlformats.org/drawingml/2006/main">
               <a:ext uri="{FF2B5EF4-FFF2-40B4-BE49-F238E27FC236}">
-                <a16:creationId xmlns:a16="http://schemas.microsoft.com/office/drawing/2014/main" id="{E641DB67-13C7-45ED-BFAB-763FC6207224}"/>
+                <a16:creationId xmlns:a16="http://schemas.microsoft.com/office/drawing/2014/main" id="{29A54F9A-3095-48ED-92B6-796ED002B479}"/>
               </a:ext>
             </a:extLst>
           </p:cNvPr>
@@ -4655,7 +4868,7 @@
           <p:cNvPr id="2" name="Title Placeholder 1">
             <a:extLst xmlns:a="http://schemas.openxmlformats.org/drawingml/2006/main">
               <a:ext uri="{FF2B5EF4-FFF2-40B4-BE49-F238E27FC236}">
-                <a16:creationId xmlns:a16="http://schemas.microsoft.com/office/drawing/2014/main" id="{19B88CEF-609A-448C-894B-7F1EB289DA9D}"/>
+                <a16:creationId xmlns:a16="http://schemas.microsoft.com/office/drawing/2014/main" id="{E4C2322D-EF6B-4986-9F53-906ACCE065D2}"/>
               </a:ext>
             </a:extLst>
           </p:cNvPr>
@@ -4690,7 +4903,7 @@
           <p:cNvPr id="3" name="Text Placeholder 2">
             <a:extLst xmlns:a="http://schemas.openxmlformats.org/drawingml/2006/main">
               <a:ext uri="{FF2B5EF4-FFF2-40B4-BE49-F238E27FC236}">
-                <a16:creationId xmlns:a16="http://schemas.microsoft.com/office/drawing/2014/main" id="{5F34D13E-0AEF-421C-8855-8080CC3F4E4D}"/>
+                <a16:creationId xmlns:a16="http://schemas.microsoft.com/office/drawing/2014/main" id="{CC41BC10-DAB4-4610-AD7C-363224BF688E}"/>
               </a:ext>
             </a:extLst>
           </p:cNvPr>
@@ -4763,7 +4976,7 @@
           <p:cNvPr id="4" name="Date Placeholder 3">
             <a:extLst xmlns:a="http://schemas.openxmlformats.org/drawingml/2006/main">
               <a:ext uri="{FF2B5EF4-FFF2-40B4-BE49-F238E27FC236}">
-                <a16:creationId xmlns:a16="http://schemas.microsoft.com/office/drawing/2014/main" id="{16D7311A-376B-4C8F-9F20-1E91446B987E}"/>
+                <a16:creationId xmlns:a16="http://schemas.microsoft.com/office/drawing/2014/main" id="{BE72BEA0-1FD7-49BD-91F8-6A0925670C1A}"/>
               </a:ext>
             </a:extLst>
           </p:cNvPr>
@@ -4810,7 +5023,7 @@
           <p:cNvPr id="5" name="Footer Placeholder 4">
             <a:extLst xmlns:a="http://schemas.openxmlformats.org/drawingml/2006/main">
               <a:ext uri="{FF2B5EF4-FFF2-40B4-BE49-F238E27FC236}">
-                <a16:creationId xmlns:a16="http://schemas.microsoft.com/office/drawing/2014/main" id="{CE3FE2C8-98CB-4E30-95AA-00321D190F3A}"/>
+                <a16:creationId xmlns:a16="http://schemas.microsoft.com/office/drawing/2014/main" id="{26448EFA-C4E4-40D6-BE20-14A36DFD32FC}"/>
               </a:ext>
             </a:extLst>
           </p:cNvPr>
@@ -4854,7 +5067,7 @@
           <p:cNvPr id="6" name="Slide Number Placeholder 5">
             <a:extLst xmlns:a="http://schemas.openxmlformats.org/drawingml/2006/main">
               <a:ext uri="{FF2B5EF4-FFF2-40B4-BE49-F238E27FC236}">
-                <a16:creationId xmlns:a16="http://schemas.microsoft.com/office/drawing/2014/main" id="{0EE928C7-7047-4180-9329-00EDC0B311D9}"/>
+                <a16:creationId xmlns:a16="http://schemas.microsoft.com/office/drawing/2014/main" id="{38ABA7A6-4382-4980-828C-81708A52FF4E}"/>
               </a:ext>
             </a:extLst>
           </p:cNvPr>
@@ -4901,7 +5114,7 @@
           <p:cNvPr id="11" name="Picture 10">
             <a:extLst xmlns:a="http://schemas.openxmlformats.org/drawingml/2006/main">
               <a:ext uri="{FF2B5EF4-FFF2-40B4-BE49-F238E27FC236}">
-                <a16:creationId xmlns:a16="http://schemas.microsoft.com/office/drawing/2014/main" id="{DD6A19D2-75BB-4AC6-AF71-37C0D83DD01F}"/>
+                <a16:creationId xmlns:a16="http://schemas.microsoft.com/office/drawing/2014/main" id="{156EAE9B-BFA8-4AAE-95CC-BAC007356656}"/>
               </a:ext>
             </a:extLst>
           </p:cNvPr>
@@ -4911,7 +5124,7 @@
           <p:nvPr/>
         </p:nvPicPr>
         <p:blipFill>
-          <a:blip xmlns:r="http://schemas.openxmlformats.org/officeDocument/2006/relationships" xmlns:a="http://schemas.openxmlformats.org/drawingml/2006/main" r:embed="Rbd76db2a93264a89"/>
+          <a:blip xmlns:r="http://schemas.openxmlformats.org/officeDocument/2006/relationships" xmlns:a="http://schemas.openxmlformats.org/drawingml/2006/main" r:embed="Rce66be37271d4bd4"/>
           <a:stretch xmlns:a="http://schemas.openxmlformats.org/drawingml/2006/main">
             <a:fillRect l="0" t="0" r="0" b="0"/>
           </a:stretch>
@@ -4930,17 +5143,17 @@
   </p:cSld>
   <p:clrMap bg1="lt1" tx1="dk1" bg2="lt2" tx2="dk2" accent1="accent1" accent2="accent2" accent3="accent3" accent4="accent4" accent5="accent5" accent6="accent6" hlink="hlink" folHlink="folHlink"/>
   <p:sldLayoutIdLst>
-    <p:sldLayoutId xmlns:r="http://schemas.openxmlformats.org/officeDocument/2006/relationships" id="2147483649" r:id="Rb0dffe1ca42543d8"/>
-    <p:sldLayoutId xmlns:r="http://schemas.openxmlformats.org/officeDocument/2006/relationships" id="2147483650" r:id="R6f2e01510e064f08"/>
-    <p:sldLayoutId xmlns:r="http://schemas.openxmlformats.org/officeDocument/2006/relationships" id="2147483651" r:id="Rc9152e9f1ebd4cd3"/>
-    <p:sldLayoutId xmlns:r="http://schemas.openxmlformats.org/officeDocument/2006/relationships" id="2147483652" r:id="R11dbf230e0a84426"/>
-    <p:sldLayoutId xmlns:r="http://schemas.openxmlformats.org/officeDocument/2006/relationships" id="2147483653" r:id="R9e76339619eb413d"/>
-    <p:sldLayoutId xmlns:r="http://schemas.openxmlformats.org/officeDocument/2006/relationships" id="2147483654" r:id="R87079784ede34c44"/>
-    <p:sldLayoutId xmlns:r="http://schemas.openxmlformats.org/officeDocument/2006/relationships" id="2147483655" r:id="R1fa5690df0494071"/>
-    <p:sldLayoutId xmlns:r="http://schemas.openxmlformats.org/officeDocument/2006/relationships" id="2147483656" r:id="R65eabe7670bf4d42"/>
-    <p:sldLayoutId xmlns:r="http://schemas.openxmlformats.org/officeDocument/2006/relationships" id="2147483657" r:id="R60bfaeb51c734396"/>
-    <p:sldLayoutId xmlns:r="http://schemas.openxmlformats.org/officeDocument/2006/relationships" id="2147483658" r:id="Rf63f8aa6d61a465a"/>
-    <p:sldLayoutId xmlns:r="http://schemas.openxmlformats.org/officeDocument/2006/relationships" id="2147483659" r:id="R4ae8351fe4854545"/>
+    <p:sldLayoutId xmlns:r="http://schemas.openxmlformats.org/officeDocument/2006/relationships" id="2147483649" r:id="Rb8fcdcd4bee64dfd"/>
+    <p:sldLayoutId xmlns:r="http://schemas.openxmlformats.org/officeDocument/2006/relationships" id="2147483650" r:id="Rc10dfdff57434a14"/>
+    <p:sldLayoutId xmlns:r="http://schemas.openxmlformats.org/officeDocument/2006/relationships" id="2147483651" r:id="R9c2538570c2a4c9e"/>
+    <p:sldLayoutId xmlns:r="http://schemas.openxmlformats.org/officeDocument/2006/relationships" id="2147483652" r:id="Ree3640f46f6b4d32"/>
+    <p:sldLayoutId xmlns:r="http://schemas.openxmlformats.org/officeDocument/2006/relationships" id="2147483653" r:id="Rfa964d1899044a12"/>
+    <p:sldLayoutId xmlns:r="http://schemas.openxmlformats.org/officeDocument/2006/relationships" id="2147483654" r:id="R569d73150b7a4182"/>
+    <p:sldLayoutId xmlns:r="http://schemas.openxmlformats.org/officeDocument/2006/relationships" id="2147483655" r:id="Rcae43301723a4505"/>
+    <p:sldLayoutId xmlns:r="http://schemas.openxmlformats.org/officeDocument/2006/relationships" id="2147483656" r:id="R576c5fb352fd4563"/>
+    <p:sldLayoutId xmlns:r="http://schemas.openxmlformats.org/officeDocument/2006/relationships" id="2147483657" r:id="R3ea742b443c944d7"/>
+    <p:sldLayoutId xmlns:r="http://schemas.openxmlformats.org/officeDocument/2006/relationships" id="2147483658" r:id="R6b55cd5bc9a04048"/>
+    <p:sldLayoutId xmlns:r="http://schemas.openxmlformats.org/officeDocument/2006/relationships" id="2147483659" r:id="R24a3b5b557d040be"/>
   </p:sldLayoutIdLst>
   <p:txStyles>
     <p:titleStyle>
@@ -5564,7 +5777,7 @@
           <p:cNvPr id="2" name="Content Placeholder 2">
             <a:extLst xmlns:a="http://schemas.openxmlformats.org/drawingml/2006/main">
               <a:ext uri="{FF2B5EF4-FFF2-40B4-BE49-F238E27FC236}">
-                <a16:creationId xmlns:a16="http://schemas.microsoft.com/office/drawing/2014/main" id="{050F9D49-FF46-4370-8009-A0C19AC1871E}"/>
+                <a16:creationId xmlns:a16="http://schemas.microsoft.com/office/drawing/2014/main" id="{EF3EF742-A661-455F-A6FD-01ECF646B2CB}"/>
               </a:ext>
             </a:extLst>
           </p:cNvPr>
@@ -5584,7 +5797,7 @@
               <a:buNone/>
             </a:pPr>
             <a:r>
-              <a:t>Edit starts with the row values.</a:t>
+              <a:t>The new row appears once.</a:t>
             </a:r>
           </a:p>
           <a:p xmlns:a="http://schemas.openxmlformats.org/drawingml/2006/main">
@@ -5592,7 +5805,7 @@
               <a:buNone/>
             </a:pPr>
             <a:r>
-              <a:t>Submit changes the existing row.</a:t>
+              <a:t>Its total matches the editor result.</a:t>
             </a:r>
           </a:p>
         </p:txBody>
@@ -5625,7 +5838,7 @@
           <a:lstStyle xmlns:a="http://schemas.openxmlformats.org/drawingml/2006/main"/>
           <a:p xmlns:a="http://schemas.openxmlformats.org/drawingml/2006/main">
             <a:r>
-              <a:t>Step 8 Check</a:t>
+              <a:t>Step 7: What changed?</a:t>
             </a:r>
             <a:endParaRPr/>
           </a:p>
@@ -5636,7 +5849,7 @@
           <p:cNvPr id="4" name="">
             <a:extLst xmlns:a="http://schemas.openxmlformats.org/drawingml/2006/main">
               <a:ext uri="{FF2B5EF4-FFF2-40B4-BE49-F238E27FC236}">
-                <a16:creationId xmlns:a16="http://schemas.microsoft.com/office/drawing/2014/main" id="{477FF106-43E3-4415-A07C-139313EACCEF}"/>
+                <a16:creationId xmlns:a16="http://schemas.microsoft.com/office/drawing/2014/main" id="{6BBCF309-CF25-4F44-914D-5582B034ECD2}"/>
               </a:ext>
             </a:extLst>
           </p:cNvPr>
@@ -5646,7 +5859,7 @@
           <p:nvPr/>
         </p:nvPicPr>
         <p:blipFill>
-          <a:blip xmlns:r="http://schemas.openxmlformats.org/officeDocument/2006/relationships" xmlns:a="http://schemas.openxmlformats.org/drawingml/2006/main" r:embed="R70bf8fa865fb46e3"/>
+          <a:blip xmlns:r="http://schemas.openxmlformats.org/officeDocument/2006/relationships" xmlns:a="http://schemas.openxmlformats.org/drawingml/2006/main" r:embed="R7ada26fe4d454192"/>
           <a:stretch xmlns:a="http://schemas.openxmlformats.org/drawingml/2006/main"/>
         </p:blipFill>
         <p:spPr>
@@ -5662,7 +5875,7 @@
     </p:spTree>
     <p:extLst>
       <p:ext uri="{BB962C8B-B14F-4D97-AF65-F5344CB8AC3E}">
-        <p14:creationId xmlns:p14="http://schemas.microsoft.com/office/powerpoint/2010/main" val="1989585470"/>
+        <p14:creationId xmlns:p14="http://schemas.microsoft.com/office/powerpoint/2010/main" val="619687019"/>
       </p:ext>
     </p:extLst>
   </p:cSld>
@@ -5686,7 +5899,7 @@
           <p:cNvPr id="2" name="Content Placeholder 2">
             <a:extLst xmlns:a="http://schemas.openxmlformats.org/drawingml/2006/main">
               <a:ext uri="{FF2B5EF4-FFF2-40B4-BE49-F238E27FC236}">
-                <a16:creationId xmlns:a16="http://schemas.microsoft.com/office/drawing/2014/main" id="{050F9D49-FF46-4370-8009-A0C19AC1871E}"/>
+                <a16:creationId xmlns:a16="http://schemas.microsoft.com/office/drawing/2014/main" id="{EF3EF742-A661-455F-A6FD-01ECF646B2CB}"/>
               </a:ext>
             </a:extLst>
           </p:cNvPr>
@@ -5706,7 +5919,7 @@
               <a:buNone/>
             </a:pPr>
             <a:r>
-              <a:t>Ask before you remove a row.</a:t>
+              <a:t>Pass the selected item to the editor.</a:t>
             </a:r>
           </a:p>
           <a:p xmlns:a="http://schemas.openxmlformats.org/drawingml/2006/main">
@@ -5714,7 +5927,7 @@
               <a:buNone/>
             </a:pPr>
             <a:r>
-              <a:t>No keeps the list as it is.</a:t>
+              <a:t>Replace the original only after Submit.</a:t>
             </a:r>
           </a:p>
         </p:txBody>
@@ -5747,7 +5960,7 @@
           <a:lstStyle xmlns:a="http://schemas.openxmlformats.org/drawingml/2006/main"/>
           <a:p xmlns:a="http://schemas.openxmlformats.org/drawingml/2006/main">
             <a:r>
-              <a:t>Step 9 Confirm deletion</a:t>
+              <a:t>Step 8: Edit an existing row</a:t>
             </a:r>
             <a:endParaRPr/>
           </a:p>
@@ -5756,7 +5969,7 @@
     </p:spTree>
     <p:extLst>
       <p:ext uri="{BB962C8B-B14F-4D97-AF65-F5344CB8AC3E}">
-        <p14:creationId xmlns:p14="http://schemas.microsoft.com/office/powerpoint/2010/main" val="2118223187"/>
+        <p14:creationId xmlns:p14="http://schemas.microsoft.com/office/powerpoint/2010/main" val="419087039"/>
       </p:ext>
     </p:extLst>
   </p:cSld>
@@ -5780,7 +5993,7 @@
           <p:cNvPr id="2" name="Content Placeholder 2">
             <a:extLst xmlns:a="http://schemas.openxmlformats.org/drawingml/2006/main">
               <a:ext uri="{FF2B5EF4-FFF2-40B4-BE49-F238E27FC236}">
-                <a16:creationId xmlns:a16="http://schemas.microsoft.com/office/drawing/2014/main" id="{050F9D49-FF46-4370-8009-A0C19AC1871E}"/>
+                <a16:creationId xmlns:a16="http://schemas.microsoft.com/office/drawing/2014/main" id="{EF3EF742-A661-455F-A6FD-01ECF646B2CB}"/>
               </a:ext>
             </a:extLst>
           </p:cNvPr>
@@ -5800,7 +6013,7 @@
               <a:buNone/>
             </a:pPr>
             <a:r>
-              <a:t>Yes removes the selected row.</a:t>
+              <a:t>Edit starts with the row values.</a:t>
             </a:r>
           </a:p>
           <a:p xmlns:a="http://schemas.openxmlformats.org/drawingml/2006/main">
@@ -5808,7 +6021,7 @@
               <a:buNone/>
             </a:pPr>
             <a:r>
-              <a:t>No keeps the selected row.</a:t>
+              <a:t>Submit changes the existing row.</a:t>
             </a:r>
           </a:p>
         </p:txBody>
@@ -5841,7 +6054,7 @@
           <a:lstStyle xmlns:a="http://schemas.openxmlformats.org/drawingml/2006/main"/>
           <a:p xmlns:a="http://schemas.openxmlformats.org/drawingml/2006/main">
             <a:r>
-              <a:t>Step 9 Check</a:t>
+              <a:t>Step 8: What changed?</a:t>
             </a:r>
             <a:endParaRPr/>
           </a:p>
@@ -5852,7 +6065,7 @@
           <p:cNvPr id="4" name="">
             <a:extLst xmlns:a="http://schemas.openxmlformats.org/drawingml/2006/main">
               <a:ext uri="{FF2B5EF4-FFF2-40B4-BE49-F238E27FC236}">
-                <a16:creationId xmlns:a16="http://schemas.microsoft.com/office/drawing/2014/main" id="{7492CF59-BF75-43BA-A132-A450CDB89DA7}"/>
+                <a16:creationId xmlns:a16="http://schemas.microsoft.com/office/drawing/2014/main" id="{BF371FA0-E125-4EC2-89A7-1DCD6BF90B0E}"/>
               </a:ext>
             </a:extLst>
           </p:cNvPr>
@@ -5862,7 +6075,7 @@
           <p:nvPr/>
         </p:nvPicPr>
         <p:blipFill>
-          <a:blip xmlns:r="http://schemas.openxmlformats.org/officeDocument/2006/relationships" xmlns:a="http://schemas.openxmlformats.org/drawingml/2006/main" r:embed="Ra26ad4fefc704f32"/>
+          <a:blip xmlns:r="http://schemas.openxmlformats.org/officeDocument/2006/relationships" xmlns:a="http://schemas.openxmlformats.org/drawingml/2006/main" r:embed="R85acc26ab7f344fa"/>
           <a:stretch xmlns:a="http://schemas.openxmlformats.org/drawingml/2006/main"/>
         </p:blipFill>
         <p:spPr>
@@ -5878,7 +6091,7 @@
     </p:spTree>
     <p:extLst>
       <p:ext uri="{BB962C8B-B14F-4D97-AF65-F5344CB8AC3E}">
-        <p14:creationId xmlns:p14="http://schemas.microsoft.com/office/powerpoint/2010/main" val="508640300"/>
+        <p14:creationId xmlns:p14="http://schemas.microsoft.com/office/powerpoint/2010/main" val="1858754980"/>
       </p:ext>
     </p:extLst>
   </p:cSld>
@@ -5902,7 +6115,7 @@
           <p:cNvPr id="2" name="Content Placeholder 2">
             <a:extLst xmlns:a="http://schemas.openxmlformats.org/drawingml/2006/main">
               <a:ext uri="{FF2B5EF4-FFF2-40B4-BE49-F238E27FC236}">
-                <a16:creationId xmlns:a16="http://schemas.microsoft.com/office/drawing/2014/main" id="{050F9D49-FF46-4370-8009-A0C19AC1871E}"/>
+                <a16:creationId xmlns:a16="http://schemas.microsoft.com/office/drawing/2014/main" id="{EF3EF742-A661-455F-A6FD-01ECF646B2CB}"/>
               </a:ext>
             </a:extLst>
           </p:cNvPr>
@@ -5922,7 +6135,7 @@
               <a:buNone/>
             </a:pPr>
             <a:r>
-              <a:t>Home, BOM, and Help are top-level pages.</a:t>
+              <a:t>Ask before you remove a row.</a:t>
             </a:r>
           </a:p>
           <a:p xmlns:a="http://schemas.openxmlformats.org/drawingml/2006/main">
@@ -5930,7 +6143,7 @@
               <a:buNone/>
             </a:pPr>
             <a:r>
-              <a:t>The editor is a temporary page.</a:t>
+              <a:t>No keeps the list as it is.</a:t>
             </a:r>
           </a:p>
         </p:txBody>
@@ -5963,7 +6176,7 @@
           <a:lstStyle xmlns:a="http://schemas.openxmlformats.org/drawingml/2006/main"/>
           <a:p xmlns:a="http://schemas.openxmlformats.org/drawingml/2006/main">
             <a:r>
-              <a:t>Step 11 Shell destinations</a:t>
+              <a:t>Step 9: Confirm deletion</a:t>
             </a:r>
             <a:endParaRPr/>
           </a:p>
@@ -5972,7 +6185,7 @@
     </p:spTree>
     <p:extLst>
       <p:ext uri="{BB962C8B-B14F-4D97-AF65-F5344CB8AC3E}">
-        <p14:creationId xmlns:p14="http://schemas.microsoft.com/office/powerpoint/2010/main" val="1747240719"/>
+        <p14:creationId xmlns:p14="http://schemas.microsoft.com/office/powerpoint/2010/main" val="961885854"/>
       </p:ext>
     </p:extLst>
   </p:cSld>
@@ -5996,7 +6209,7 @@
           <p:cNvPr id="2" name="Content Placeholder 2">
             <a:extLst xmlns:a="http://schemas.openxmlformats.org/drawingml/2006/main">
               <a:ext uri="{FF2B5EF4-FFF2-40B4-BE49-F238E27FC236}">
-                <a16:creationId xmlns:a16="http://schemas.microsoft.com/office/drawing/2014/main" id="{050F9D49-FF46-4370-8009-A0C19AC1871E}"/>
+                <a16:creationId xmlns:a16="http://schemas.microsoft.com/office/drawing/2014/main" id="{EF3EF742-A661-455F-A6FD-01ECF646B2CB}"/>
               </a:ext>
             </a:extLst>
           </p:cNvPr>
@@ -6016,7 +6229,7 @@
               <a:buNone/>
             </a:pPr>
             <a:r>
-              <a:t>The Shell menu opens each page.</a:t>
+              <a:t>Yes removes the selected row.</a:t>
             </a:r>
           </a:p>
           <a:p xmlns:a="http://schemas.openxmlformats.org/drawingml/2006/main">
@@ -6024,7 +6237,7 @@
               <a:buNone/>
             </a:pPr>
             <a:r>
-              <a:t>Back returns from the editor.</a:t>
+              <a:t>No keeps the selected row.</a:t>
             </a:r>
           </a:p>
         </p:txBody>
@@ -6057,7 +6270,7 @@
           <a:lstStyle xmlns:a="http://schemas.openxmlformats.org/drawingml/2006/main"/>
           <a:p xmlns:a="http://schemas.openxmlformats.org/drawingml/2006/main">
             <a:r>
-              <a:t>Step 11 Check</a:t>
+              <a:t>Step 9: What changed?</a:t>
             </a:r>
             <a:endParaRPr/>
           </a:p>
@@ -6068,7 +6281,7 @@
           <p:cNvPr id="4" name="">
             <a:extLst xmlns:a="http://schemas.openxmlformats.org/drawingml/2006/main">
               <a:ext uri="{FF2B5EF4-FFF2-40B4-BE49-F238E27FC236}">
-                <a16:creationId xmlns:a16="http://schemas.microsoft.com/office/drawing/2014/main" id="{F78795F0-BCD3-4DE6-84CC-50288F60C9B7}"/>
+                <a16:creationId xmlns:a16="http://schemas.microsoft.com/office/drawing/2014/main" id="{0F74A2A2-DC40-438D-82B9-9FD9E73EE50A}"/>
               </a:ext>
             </a:extLst>
           </p:cNvPr>
@@ -6078,7 +6291,7 @@
           <p:nvPr/>
         </p:nvPicPr>
         <p:blipFill>
-          <a:blip xmlns:r="http://schemas.openxmlformats.org/officeDocument/2006/relationships" xmlns:a="http://schemas.openxmlformats.org/drawingml/2006/main" r:embed="R2b271ccec844458d"/>
+          <a:blip xmlns:r="http://schemas.openxmlformats.org/officeDocument/2006/relationships" xmlns:a="http://schemas.openxmlformats.org/drawingml/2006/main" r:embed="Rb1d8aa2057c1488a"/>
           <a:stretch xmlns:a="http://schemas.openxmlformats.org/drawingml/2006/main"/>
         </p:blipFill>
         <p:spPr>
@@ -6094,7 +6307,7 @@
     </p:spTree>
     <p:extLst>
       <p:ext uri="{BB962C8B-B14F-4D97-AF65-F5344CB8AC3E}">
-        <p14:creationId xmlns:p14="http://schemas.microsoft.com/office/powerpoint/2010/main" val="308250312"/>
+        <p14:creationId xmlns:p14="http://schemas.microsoft.com/office/powerpoint/2010/main" val="1845977970"/>
       </p:ext>
     </p:extLst>
   </p:cSld>
@@ -6118,7 +6331,7 @@
           <p:cNvPr id="2" name="Content Placeholder 2">
             <a:extLst xmlns:a="http://schemas.openxmlformats.org/drawingml/2006/main">
               <a:ext uri="{FF2B5EF4-FFF2-40B4-BE49-F238E27FC236}">
-                <a16:creationId xmlns:a16="http://schemas.microsoft.com/office/drawing/2014/main" id="{050F9D49-FF46-4370-8009-A0C19AC1871E}"/>
+                <a16:creationId xmlns:a16="http://schemas.microsoft.com/office/drawing/2014/main" id="{EF3EF742-A661-455F-A6FD-01ECF646B2CB}"/>
               </a:ext>
             </a:extLst>
           </p:cNvPr>
@@ -6138,7 +6351,7 @@
               <a:buNone/>
             </a:pPr>
             <a:r>
-              <a:t>Show the completed app workflow.</a:t>
+              <a:t>Home, BOM, and Help are top-level pages.</a:t>
             </a:r>
           </a:p>
           <a:p xmlns:a="http://schemas.openxmlformats.org/drawingml/2006/main">
@@ -6146,15 +6359,7 @@
               <a:buNone/>
             </a:pPr>
             <a:r>
-              <a:t>Explain which responsibility changed.</a:t>
-            </a:r>
-          </a:p>
-          <a:p xmlns:a="http://schemas.openxmlformats.org/drawingml/2006/main">
-            <a:pPr lvl="0">
-              <a:buNone/>
-            </a:pPr>
-            <a:r>
-              <a:t>Check the result before the next module.</a:t>
+              <a:t>The editor is a temporary page.</a:t>
             </a:r>
           </a:p>
         </p:txBody>
@@ -6187,7 +6392,7 @@
           <a:lstStyle xmlns:a="http://schemas.openxmlformats.org/drawingml/2006/main"/>
           <a:p xmlns:a="http://schemas.openxmlformats.org/drawingml/2006/main">
             <a:r>
-              <a:t>Module review</a:t>
+              <a:t>Step 11: Shell destinations</a:t>
             </a:r>
             <a:endParaRPr/>
           </a:p>
@@ -6196,7 +6401,333 @@
     </p:spTree>
     <p:extLst>
       <p:ext uri="{BB962C8B-B14F-4D97-AF65-F5344CB8AC3E}">
-        <p14:creationId xmlns:p14="http://schemas.microsoft.com/office/powerpoint/2010/main" val="490970318"/>
+        <p14:creationId xmlns:p14="http://schemas.microsoft.com/office/powerpoint/2010/main" val="542430445"/>
+      </p:ext>
+    </p:extLst>
+  </p:cSld>
+</p:sld>
+</file>
+
+<file path=ppt/slides/slide16.xml><?xml version="1.0" encoding="utf-8"?>
+<p:sld xmlns:p="http://schemas.openxmlformats.org/presentationml/2006/main">
+  <p:cSld>
+    <p:spTree>
+      <p:nvGrpSpPr>
+        <p:cNvPr id="1" name=""/>
+        <p:cNvGrpSpPr/>
+        <p:nvPr/>
+      </p:nvGrpSpPr>
+      <p:grpSpPr>
+        <a:xfrm xmlns:a="http://schemas.openxmlformats.org/drawingml/2006/main"/>
+      </p:grpSpPr>
+      <p:sp>
+        <p:nvSpPr>
+          <p:cNvPr id="2" name="Content Placeholder 2">
+            <a:extLst xmlns:a="http://schemas.openxmlformats.org/drawingml/2006/main">
+              <a:ext uri="{FF2B5EF4-FFF2-40B4-BE49-F238E27FC236}">
+                <a16:creationId xmlns:a16="http://schemas.microsoft.com/office/drawing/2014/main" id="{EF3EF742-A661-455F-A6FD-01ECF646B2CB}"/>
+              </a:ext>
+            </a:extLst>
+          </p:cNvPr>
+          <p:cNvSpPr>
+            <a:spLocks xmlns:a="http://schemas.openxmlformats.org/drawingml/2006/main" noGrp="1"/>
+          </p:cNvSpPr>
+          <p:nvPr>
+            <p:ph idx="1"/>
+          </p:nvPr>
+        </p:nvSpPr>
+        <p:spPr/>
+        <p:txBody>
+          <a:bodyPr xmlns:a="http://schemas.openxmlformats.org/drawingml/2006/main"/>
+          <a:lstStyle xmlns:a="http://schemas.openxmlformats.org/drawingml/2006/main"/>
+          <a:p xmlns:a="http://schemas.openxmlformats.org/drawingml/2006/main">
+            <a:pPr lvl="0">
+              <a:buNone/>
+            </a:pPr>
+            <a:r>
+              <a:t>The Shell menu opens each page.</a:t>
+            </a:r>
+          </a:p>
+          <a:p xmlns:a="http://schemas.openxmlformats.org/drawingml/2006/main">
+            <a:pPr lvl="0">
+              <a:buNone/>
+            </a:pPr>
+            <a:r>
+              <a:t>Back returns from the editor.</a:t>
+            </a:r>
+          </a:p>
+        </p:txBody>
+      </p:sp>
+      <p:sp>
+        <p:nvSpPr>
+          <p:cNvPr id="3" name="Title Placeholder 1">
+            <a:extLst xmlns:a="http://schemas.openxmlformats.org/drawingml/2006/main">
+              <a:ext uri="{FF2B5EF4-FFF2-40B4-BE49-F238E27FC236}">
+                <a16:creationId xmlns:a16="http://schemas.microsoft.com/office/drawing/2014/main" id="{2DF4F548-EDEF-186D-6633-AF1ABC814BC1}"/>
+              </a:ext>
+            </a:extLst>
+          </p:cNvPr>
+          <p:cNvSpPr>
+            <a:spLocks xmlns:a="http://schemas.openxmlformats.org/drawingml/2006/main" noGrp="1"/>
+          </p:cNvSpPr>
+          <p:nvPr>
+            <p:ph type="title" idx="0"/>
+          </p:nvPr>
+        </p:nvSpPr>
+        <p:spPr>
+          <a:prstGeom xmlns:a="http://schemas.openxmlformats.org/drawingml/2006/main" prst="rect">
+            <a:avLst/>
+          </a:prstGeom>
+        </p:spPr>
+        <p:txBody>
+          <a:bodyPr xmlns:a="http://schemas.openxmlformats.org/drawingml/2006/main" vert="horz" lIns="91440" tIns="45720" rIns="91440" bIns="45720" anchor="ctr">
+            <a:normAutofit fontScale="100000"/>
+          </a:bodyPr>
+          <a:lstStyle xmlns:a="http://schemas.openxmlformats.org/drawingml/2006/main"/>
+          <a:p xmlns:a="http://schemas.openxmlformats.org/drawingml/2006/main">
+            <a:r>
+              <a:t>Step 11: What changed?</a:t>
+            </a:r>
+            <a:endParaRPr/>
+          </a:p>
+        </p:txBody>
+      </p:sp>
+      <p:pic>
+        <p:nvPicPr>
+          <p:cNvPr id="4" name="">
+            <a:extLst xmlns:a="http://schemas.openxmlformats.org/drawingml/2006/main">
+              <a:ext uri="{FF2B5EF4-FFF2-40B4-BE49-F238E27FC236}">
+                <a16:creationId xmlns:a16="http://schemas.microsoft.com/office/drawing/2014/main" id="{E5F0C466-773C-414A-B1D5-5936FC83C37C}"/>
+              </a:ext>
+            </a:extLst>
+          </p:cNvPr>
+          <p:cNvPicPr>
+            <a:picLocks xmlns:a="http://schemas.openxmlformats.org/drawingml/2006/main" noChangeAspect="1"/>
+          </p:cNvPicPr>
+          <p:nvPr/>
+        </p:nvPicPr>
+        <p:blipFill>
+          <a:blip xmlns:r="http://schemas.openxmlformats.org/officeDocument/2006/relationships" xmlns:a="http://schemas.openxmlformats.org/drawingml/2006/main" r:embed="R2d58aef86a4d44bf"/>
+          <a:stretch xmlns:a="http://schemas.openxmlformats.org/drawingml/2006/main"/>
+        </p:blipFill>
+        <p:spPr>
+          <a:xfrm xmlns:a="http://schemas.openxmlformats.org/drawingml/2006/main">
+            <a:off x="3418237" y="3190875"/>
+            <a:ext cx="5355525" cy="3048000"/>
+          </a:xfrm>
+          <a:prstGeom xmlns:a="http://schemas.openxmlformats.org/drawingml/2006/main" prst="rect">
+            <a:avLst/>
+          </a:prstGeom>
+        </p:spPr>
+      </p:pic>
+    </p:spTree>
+    <p:extLst>
+      <p:ext uri="{BB962C8B-B14F-4D97-AF65-F5344CB8AC3E}">
+        <p14:creationId xmlns:p14="http://schemas.microsoft.com/office/powerpoint/2010/main" val="1588602913"/>
+      </p:ext>
+    </p:extLst>
+  </p:cSld>
+</p:sld>
+</file>
+
+<file path=ppt/slides/slide17.xml><?xml version="1.0" encoding="utf-8"?>
+<p:sld xmlns:p="http://schemas.openxmlformats.org/presentationml/2006/main">
+  <p:cSld>
+    <p:spTree>
+      <p:nvGrpSpPr>
+        <p:cNvPr id="1" name=""/>
+        <p:cNvGrpSpPr/>
+        <p:nvPr/>
+      </p:nvGrpSpPr>
+      <p:grpSpPr>
+        <a:xfrm xmlns:a="http://schemas.openxmlformats.org/drawingml/2006/main"/>
+      </p:grpSpPr>
+      <p:sp>
+        <p:nvSpPr>
+          <p:cNvPr id="2" name="Content Placeholder 2">
+            <a:extLst xmlns:a="http://schemas.openxmlformats.org/drawingml/2006/main">
+              <a:ext uri="{FF2B5EF4-FFF2-40B4-BE49-F238E27FC236}">
+                <a16:creationId xmlns:a16="http://schemas.microsoft.com/office/drawing/2014/main" id="{EF3EF742-A661-455F-A6FD-01ECF646B2CB}"/>
+              </a:ext>
+            </a:extLst>
+          </p:cNvPr>
+          <p:cNvSpPr>
+            <a:spLocks xmlns:a="http://schemas.openxmlformats.org/drawingml/2006/main" noGrp="1"/>
+          </p:cNvSpPr>
+          <p:nvPr>
+            <p:ph idx="1"/>
+          </p:nvPr>
+        </p:nvSpPr>
+        <p:spPr/>
+        <p:txBody>
+          <a:bodyPr xmlns:a="http://schemas.openxmlformats.org/drawingml/2006/main"/>
+          <a:lstStyle xmlns:a="http://schemas.openxmlformats.org/drawingml/2006/main"/>
+          <a:p xmlns:a="http://schemas.openxmlformats.org/drawingml/2006/main">
+            <a:pPr lvl="0">
+              <a:buNone/>
+            </a:pPr>
+            <a:r>
+              <a:t>I can explain what an ItemsSource contains.</a:t>
+            </a:r>
+          </a:p>
+          <a:p xmlns:a="http://schemas.openxmlformats.org/drawingml/2006/main">
+            <a:pPr lvl="0">
+              <a:buNone/>
+            </a:pPr>
+            <a:r>
+              <a:t>I can trace Add, Edit, and Delete for one row.</a:t>
+            </a:r>
+          </a:p>
+          <a:p xmlns:a="http://schemas.openxmlformats.org/drawingml/2006/main">
+            <a:pPr lvl="0">
+              <a:buNone/>
+            </a:pPr>
+            <a:r>
+              <a:t>I can distinguish a page destination from the editor route.</a:t>
+            </a:r>
+          </a:p>
+        </p:txBody>
+      </p:sp>
+      <p:sp>
+        <p:nvSpPr>
+          <p:cNvPr id="3" name="Title Placeholder 1">
+            <a:extLst xmlns:a="http://schemas.openxmlformats.org/drawingml/2006/main">
+              <a:ext uri="{FF2B5EF4-FFF2-40B4-BE49-F238E27FC236}">
+                <a16:creationId xmlns:a16="http://schemas.microsoft.com/office/drawing/2014/main" id="{2DF4F548-EDEF-186D-6633-AF1ABC814BC1}"/>
+              </a:ext>
+            </a:extLst>
+          </p:cNvPr>
+          <p:cNvSpPr>
+            <a:spLocks xmlns:a="http://schemas.openxmlformats.org/drawingml/2006/main" noGrp="1"/>
+          </p:cNvSpPr>
+          <p:nvPr>
+            <p:ph type="title" idx="0"/>
+          </p:nvPr>
+        </p:nvSpPr>
+        <p:spPr>
+          <a:prstGeom xmlns:a="http://schemas.openxmlformats.org/drawingml/2006/main" prst="rect">
+            <a:avLst/>
+          </a:prstGeom>
+        </p:spPr>
+        <p:txBody>
+          <a:bodyPr xmlns:a="http://schemas.openxmlformats.org/drawingml/2006/main" vert="horz" lIns="91440" tIns="45720" rIns="91440" bIns="45720" anchor="ctr">
+            <a:normAutofit fontScale="100000"/>
+          </a:bodyPr>
+          <a:lstStyle xmlns:a="http://schemas.openxmlformats.org/drawingml/2006/main"/>
+          <a:p xmlns:a="http://schemas.openxmlformats.org/drawingml/2006/main">
+            <a:r>
+              <a:t>What you can now explain</a:t>
+            </a:r>
+            <a:endParaRPr/>
+          </a:p>
+        </p:txBody>
+      </p:sp>
+    </p:spTree>
+    <p:extLst>
+      <p:ext uri="{BB962C8B-B14F-4D97-AF65-F5344CB8AC3E}">
+        <p14:creationId xmlns:p14="http://schemas.microsoft.com/office/powerpoint/2010/main" val="2134105602"/>
+      </p:ext>
+    </p:extLst>
+  </p:cSld>
+</p:sld>
+</file>
+
+<file path=ppt/slides/slide18.xml><?xml version="1.0" encoding="utf-8"?>
+<p:sld xmlns:p="http://schemas.openxmlformats.org/presentationml/2006/main">
+  <p:cSld>
+    <p:spTree>
+      <p:nvGrpSpPr>
+        <p:cNvPr id="1" name=""/>
+        <p:cNvGrpSpPr/>
+        <p:nvPr/>
+      </p:nvGrpSpPr>
+      <p:grpSpPr>
+        <a:xfrm xmlns:a="http://schemas.openxmlformats.org/drawingml/2006/main"/>
+      </p:grpSpPr>
+      <p:sp>
+        <p:nvSpPr>
+          <p:cNvPr id="2" name="Content Placeholder 2">
+            <a:extLst xmlns:a="http://schemas.openxmlformats.org/drawingml/2006/main">
+              <a:ext uri="{FF2B5EF4-FFF2-40B4-BE49-F238E27FC236}">
+                <a16:creationId xmlns:a16="http://schemas.microsoft.com/office/drawing/2014/main" id="{EF3EF742-A661-455F-A6FD-01ECF646B2CB}"/>
+              </a:ext>
+            </a:extLst>
+          </p:cNvPr>
+          <p:cNvSpPr>
+            <a:spLocks xmlns:a="http://schemas.openxmlformats.org/drawingml/2006/main" noGrp="1"/>
+          </p:cNvSpPr>
+          <p:nvPr>
+            <p:ph idx="1"/>
+          </p:nvPr>
+        </p:nvSpPr>
+        <p:spPr/>
+        <p:txBody>
+          <a:bodyPr xmlns:a="http://schemas.openxmlformats.org/drawingml/2006/main"/>
+          <a:lstStyle xmlns:a="http://schemas.openxmlformats.org/drawingml/2006/main"/>
+          <a:p xmlns:a="http://schemas.openxmlformats.org/drawingml/2006/main">
+            <a:pPr lvl="0">
+              <a:buNone/>
+            </a:pPr>
+            <a:r>
+              <a:t>CollectionView data</a:t>
+            </a:r>
+          </a:p>
+          <a:p xmlns:a="http://schemas.openxmlformats.org/drawingml/2006/main">
+            <a:pPr lvl="0">
+              <a:buNone/>
+            </a:pPr>
+            <a:r>
+              <a:t>Search Microsoft Learn for this topic.</a:t>
+            </a:r>
+          </a:p>
+          <a:p xmlns:a="http://schemas.openxmlformats.org/drawingml/2006/main">
+            <a:pPr lvl="0">
+              <a:buNone/>
+            </a:pPr>
+            <a:r>
+              <a:t>Try one example in a small test page.</a:t>
+            </a:r>
+          </a:p>
+        </p:txBody>
+      </p:sp>
+      <p:sp>
+        <p:nvSpPr>
+          <p:cNvPr id="3" name="Title Placeholder 1">
+            <a:extLst xmlns:a="http://schemas.openxmlformats.org/drawingml/2006/main">
+              <a:ext uri="{FF2B5EF4-FFF2-40B4-BE49-F238E27FC236}">
+                <a16:creationId xmlns:a16="http://schemas.microsoft.com/office/drawing/2014/main" id="{2DF4F548-EDEF-186D-6633-AF1ABC814BC1}"/>
+              </a:ext>
+            </a:extLst>
+          </p:cNvPr>
+          <p:cNvSpPr>
+            <a:spLocks xmlns:a="http://schemas.openxmlformats.org/drawingml/2006/main" noGrp="1"/>
+          </p:cNvSpPr>
+          <p:nvPr>
+            <p:ph type="title" idx="0"/>
+          </p:nvPr>
+        </p:nvSpPr>
+        <p:spPr>
+          <a:prstGeom xmlns:a="http://schemas.openxmlformats.org/drawingml/2006/main" prst="rect">
+            <a:avLst/>
+          </a:prstGeom>
+        </p:spPr>
+        <p:txBody>
+          <a:bodyPr xmlns:a="http://schemas.openxmlformats.org/drawingml/2006/main" vert="horz" lIns="91440" tIns="45720" rIns="91440" bIns="45720" anchor="ctr">
+            <a:normAutofit fontScale="100000"/>
+          </a:bodyPr>
+          <a:lstStyle xmlns:a="http://schemas.openxmlformats.org/drawingml/2006/main"/>
+          <a:p xmlns:a="http://schemas.openxmlformats.org/drawingml/2006/main">
+            <a:r>
+              <a:t>Read more in MAUI documentation</a:t>
+            </a:r>
+            <a:endParaRPr/>
+          </a:p>
+        </p:txBody>
+      </p:sp>
+    </p:spTree>
+    <p:extLst>
+      <p:ext uri="{BB962C8B-B14F-4D97-AF65-F5344CB8AC3E}">
+        <p14:creationId xmlns:p14="http://schemas.microsoft.com/office/powerpoint/2010/main" val="789407516"/>
       </p:ext>
     </p:extLst>
   </p:cSld>
@@ -6220,7 +6751,7 @@
           <p:cNvPr id="2" name="Content Placeholder 2">
             <a:extLst xmlns:a="http://schemas.openxmlformats.org/drawingml/2006/main">
               <a:ext uri="{FF2B5EF4-FFF2-40B4-BE49-F238E27FC236}">
-                <a16:creationId xmlns:a16="http://schemas.microsoft.com/office/drawing/2014/main" id="{050F9D49-FF46-4370-8009-A0C19AC1871E}"/>
+                <a16:creationId xmlns:a16="http://schemas.microsoft.com/office/drawing/2014/main" id="{EF3EF742-A661-455F-A6FD-01ECF646B2CB}"/>
               </a:ext>
             </a:extLst>
           </p:cNvPr>
@@ -6289,7 +6820,7 @@
           <a:lstStyle xmlns:a="http://schemas.openxmlformats.org/drawingml/2006/main"/>
           <a:p xmlns:a="http://schemas.openxmlformats.org/drawingml/2006/main">
             <a:r>
-              <a:t>Exercise overview</a:t>
+              <a:t>What you will build</a:t>
             </a:r>
             <a:endParaRPr/>
           </a:p>
@@ -6298,7 +6829,7 @@
     </p:spTree>
     <p:extLst>
       <p:ext uri="{BB962C8B-B14F-4D97-AF65-F5344CB8AC3E}">
-        <p14:creationId xmlns:p14="http://schemas.microsoft.com/office/powerpoint/2010/main" val="2138489541"/>
+        <p14:creationId xmlns:p14="http://schemas.microsoft.com/office/powerpoint/2010/main" val="1451809914"/>
       </p:ext>
     </p:extLst>
   </p:cSld>
@@ -6322,7 +6853,7 @@
           <p:cNvPr id="2" name="Content Placeholder 2">
             <a:extLst xmlns:a="http://schemas.openxmlformats.org/drawingml/2006/main">
               <a:ext uri="{FF2B5EF4-FFF2-40B4-BE49-F238E27FC236}">
-                <a16:creationId xmlns:a16="http://schemas.microsoft.com/office/drawing/2014/main" id="{050F9D49-FF46-4370-8009-A0C19AC1871E}"/>
+                <a16:creationId xmlns:a16="http://schemas.microsoft.com/office/drawing/2014/main" id="{EF3EF742-A661-455F-A6FD-01ECF646B2CB}"/>
               </a:ext>
             </a:extLst>
           </p:cNvPr>
@@ -6342,7 +6873,7 @@
               <a:buNone/>
             </a:pPr>
             <a:r>
-              <a:t>The editor returns a MaterialItem.</a:t>
+              <a:t>CollectionView repeats one DataTemplate for each item.</a:t>
             </a:r>
           </a:p>
           <a:p xmlns:a="http://schemas.openxmlformats.org/drawingml/2006/main">
@@ -6350,7 +6881,15 @@
               <a:buNone/>
             </a:pPr>
             <a:r>
-              <a:t>Cancel returns without a new item.</a:t>
+              <a:t>Inside a row, bindings read that row’s MaterialItem.</a:t>
+            </a:r>
+          </a:p>
+          <a:p xmlns:a="http://schemas.openxmlformats.org/drawingml/2006/main">
+            <a:pPr lvl="0">
+              <a:buNone/>
+            </a:pPr>
+            <a:r>
+              <a:t>The page controls when the list changes.</a:t>
             </a:r>
           </a:p>
         </p:txBody>
@@ -6383,16 +6922,44 @@
           <a:lstStyle xmlns:a="http://schemas.openxmlformats.org/drawingml/2006/main"/>
           <a:p xmlns:a="http://schemas.openxmlformats.org/drawingml/2006/main">
             <a:r>
-              <a:t>Step 2 Return an item</a:t>
+              <a:t>One template, many item rows</a:t>
             </a:r>
             <a:endParaRPr/>
           </a:p>
         </p:txBody>
       </p:sp>
+      <p:pic>
+        <p:nvPicPr>
+          <p:cNvPr id="4" name="">
+            <a:extLst xmlns:a="http://schemas.openxmlformats.org/drawingml/2006/main">
+              <a:ext uri="{FF2B5EF4-FFF2-40B4-BE49-F238E27FC236}">
+                <a16:creationId xmlns:a16="http://schemas.microsoft.com/office/drawing/2014/main" id="{1FFA747C-B6A6-49EB-973F-CCB862D1AF19}"/>
+              </a:ext>
+            </a:extLst>
+          </p:cNvPr>
+          <p:cNvPicPr>
+            <a:picLocks xmlns:a="http://schemas.openxmlformats.org/drawingml/2006/main" noChangeAspect="1"/>
+          </p:cNvPicPr>
+          <p:nvPr/>
+        </p:nvPicPr>
+        <p:blipFill>
+          <a:blip xmlns:r="http://schemas.openxmlformats.org/officeDocument/2006/relationships" xmlns:a="http://schemas.openxmlformats.org/drawingml/2006/main" r:embed="R6336e2f83e5e4f42"/>
+          <a:stretch xmlns:a="http://schemas.openxmlformats.org/drawingml/2006/main"/>
+        </p:blipFill>
+        <p:spPr>
+          <a:xfrm xmlns:a="http://schemas.openxmlformats.org/drawingml/2006/main">
+            <a:off x="3418237" y="3190875"/>
+            <a:ext cx="5355525" cy="3048000"/>
+          </a:xfrm>
+          <a:prstGeom xmlns:a="http://schemas.openxmlformats.org/drawingml/2006/main" prst="rect">
+            <a:avLst/>
+          </a:prstGeom>
+        </p:spPr>
+      </p:pic>
     </p:spTree>
     <p:extLst>
       <p:ext uri="{BB962C8B-B14F-4D97-AF65-F5344CB8AC3E}">
-        <p14:creationId xmlns:p14="http://schemas.microsoft.com/office/powerpoint/2010/main" val="637824807"/>
+        <p14:creationId xmlns:p14="http://schemas.microsoft.com/office/powerpoint/2010/main" val="1188781298"/>
       </p:ext>
     </p:extLst>
   </p:cSld>
@@ -6416,7 +6983,7 @@
           <p:cNvPr id="2" name="Content Placeholder 2">
             <a:extLst xmlns:a="http://schemas.openxmlformats.org/drawingml/2006/main">
               <a:ext uri="{FF2B5EF4-FFF2-40B4-BE49-F238E27FC236}">
-                <a16:creationId xmlns:a16="http://schemas.microsoft.com/office/drawing/2014/main" id="{050F9D49-FF46-4370-8009-A0C19AC1871E}"/>
+                <a16:creationId xmlns:a16="http://schemas.microsoft.com/office/drawing/2014/main" id="{EF3EF742-A661-455F-A6FD-01ECF646B2CB}"/>
               </a:ext>
             </a:extLst>
           </p:cNvPr>
@@ -6436,7 +7003,7 @@
               <a:buNone/>
             </a:pPr>
             <a:r>
-              <a:t>The page can hold a submitted item.</a:t>
+              <a:t>Add, Edit, and Delete change C# list data.</a:t>
             </a:r>
           </a:p>
           <a:p xmlns:a="http://schemas.openxmlformats.org/drawingml/2006/main">
@@ -6444,7 +7011,15 @@
               <a:buNone/>
             </a:pPr>
             <a:r>
-              <a:t>A new editor starts with empty fields.</a:t>
+              <a:t>This module tells the view to refresh after a change.</a:t>
+            </a:r>
+          </a:p>
+          <a:p xmlns:a="http://schemas.openxmlformats.org/drawingml/2006/main">
+            <a:pPr lvl="0">
+              <a:buNone/>
+            </a:pPr>
+            <a:r>
+              <a:t>Later modules make that update automatic.</a:t>
             </a:r>
           </a:p>
         </p:txBody>
@@ -6477,44 +7052,16 @@
           <a:lstStyle xmlns:a="http://schemas.openxmlformats.org/drawingml/2006/main"/>
           <a:p xmlns:a="http://schemas.openxmlformats.org/drawingml/2006/main">
             <a:r>
-              <a:t>Step 2 Check</a:t>
+              <a:t>From C# to the screen</a:t>
             </a:r>
             <a:endParaRPr/>
           </a:p>
         </p:txBody>
       </p:sp>
-      <p:pic>
-        <p:nvPicPr>
-          <p:cNvPr id="4" name="">
-            <a:extLst xmlns:a="http://schemas.openxmlformats.org/drawingml/2006/main">
-              <a:ext uri="{FF2B5EF4-FFF2-40B4-BE49-F238E27FC236}">
-                <a16:creationId xmlns:a16="http://schemas.microsoft.com/office/drawing/2014/main" id="{A90AAFA7-18D4-4830-978E-144848FABE8C}"/>
-              </a:ext>
-            </a:extLst>
-          </p:cNvPr>
-          <p:cNvPicPr>
-            <a:picLocks xmlns:a="http://schemas.openxmlformats.org/drawingml/2006/main" noChangeAspect="1"/>
-          </p:cNvPicPr>
-          <p:nvPr/>
-        </p:nvPicPr>
-        <p:blipFill>
-          <a:blip xmlns:r="http://schemas.openxmlformats.org/officeDocument/2006/relationships" xmlns:a="http://schemas.openxmlformats.org/drawingml/2006/main" r:embed="R5c1d6024ebce4df1"/>
-          <a:stretch xmlns:a="http://schemas.openxmlformats.org/drawingml/2006/main"/>
-        </p:blipFill>
-        <p:spPr>
-          <a:xfrm xmlns:a="http://schemas.openxmlformats.org/drawingml/2006/main">
-            <a:off x="3418237" y="3190875"/>
-            <a:ext cx="5355525" cy="3048000"/>
-          </a:xfrm>
-          <a:prstGeom xmlns:a="http://schemas.openxmlformats.org/drawingml/2006/main" prst="rect">
-            <a:avLst/>
-          </a:prstGeom>
-        </p:spPr>
-      </p:pic>
     </p:spTree>
     <p:extLst>
       <p:ext uri="{BB962C8B-B14F-4D97-AF65-F5344CB8AC3E}">
-        <p14:creationId xmlns:p14="http://schemas.microsoft.com/office/powerpoint/2010/main" val="1584309003"/>
+        <p14:creationId xmlns:p14="http://schemas.microsoft.com/office/powerpoint/2010/main" val="1007234648"/>
       </p:ext>
     </p:extLst>
   </p:cSld>
@@ -6538,7 +7085,7 @@
           <p:cNvPr id="2" name="Content Placeholder 2">
             <a:extLst xmlns:a="http://schemas.openxmlformats.org/drawingml/2006/main">
               <a:ext uri="{FF2B5EF4-FFF2-40B4-BE49-F238E27FC236}">
-                <a16:creationId xmlns:a16="http://schemas.microsoft.com/office/drawing/2014/main" id="{050F9D49-FF46-4370-8009-A0C19AC1871E}"/>
+                <a16:creationId xmlns:a16="http://schemas.microsoft.com/office/drawing/2014/main" id="{EF3EF742-A661-455F-A6FD-01ECF646B2CB}"/>
               </a:ext>
             </a:extLst>
           </p:cNvPr>
@@ -6558,7 +7105,7 @@
               <a:buNone/>
             </a:pPr>
             <a:r>
-              <a:t>CollectionView repeats a row template.</a:t>
+              <a:t>The editor returns a MaterialItem.</a:t>
             </a:r>
           </a:p>
           <a:p xmlns:a="http://schemas.openxmlformats.org/drawingml/2006/main">
@@ -6566,7 +7113,7 @@
               <a:buNone/>
             </a:pPr>
             <a:r>
-              <a:t>BindingContext supplies each row item.</a:t>
+              <a:t>Cancel returns without a new item.</a:t>
             </a:r>
           </a:p>
         </p:txBody>
@@ -6599,7 +7146,7 @@
           <a:lstStyle xmlns:a="http://schemas.openxmlformats.org/drawingml/2006/main"/>
           <a:p xmlns:a="http://schemas.openxmlformats.org/drawingml/2006/main">
             <a:r>
-              <a:t>Step 6 CollectionView rows</a:t>
+              <a:t>Step 2: Return an item</a:t>
             </a:r>
             <a:endParaRPr/>
           </a:p>
@@ -6608,7 +7155,7 @@
     </p:spTree>
     <p:extLst>
       <p:ext uri="{BB962C8B-B14F-4D97-AF65-F5344CB8AC3E}">
-        <p14:creationId xmlns:p14="http://schemas.microsoft.com/office/powerpoint/2010/main" val="816907409"/>
+        <p14:creationId xmlns:p14="http://schemas.microsoft.com/office/powerpoint/2010/main" val="1040227209"/>
       </p:ext>
     </p:extLst>
   </p:cSld>
@@ -6632,7 +7179,7 @@
           <p:cNvPr id="2" name="Content Placeholder 2">
             <a:extLst xmlns:a="http://schemas.openxmlformats.org/drawingml/2006/main">
               <a:ext uri="{FF2B5EF4-FFF2-40B4-BE49-F238E27FC236}">
-                <a16:creationId xmlns:a16="http://schemas.microsoft.com/office/drawing/2014/main" id="{050F9D49-FF46-4370-8009-A0C19AC1871E}"/>
+                <a16:creationId xmlns:a16="http://schemas.microsoft.com/office/drawing/2014/main" id="{EF3EF742-A661-455F-A6FD-01ECF646B2CB}"/>
               </a:ext>
             </a:extLst>
           </p:cNvPr>
@@ -6652,7 +7199,7 @@
               <a:buNone/>
             </a:pPr>
             <a:r>
-              <a:t>The BOM shows each sample item.</a:t>
+              <a:t>The page can hold a submitted item.</a:t>
             </a:r>
           </a:p>
           <a:p xmlns:a="http://schemas.openxmlformats.org/drawingml/2006/main">
@@ -6660,7 +7207,7 @@
               <a:buNone/>
             </a:pPr>
             <a:r>
-              <a:t>Each row shows its calculated cost.</a:t>
+              <a:t>A new editor starts with empty fields.</a:t>
             </a:r>
           </a:p>
         </p:txBody>
@@ -6693,7 +7240,7 @@
           <a:lstStyle xmlns:a="http://schemas.openxmlformats.org/drawingml/2006/main"/>
           <a:p xmlns:a="http://schemas.openxmlformats.org/drawingml/2006/main">
             <a:r>
-              <a:t>Step 6 Check</a:t>
+              <a:t>Step 2: What changed?</a:t>
             </a:r>
             <a:endParaRPr/>
           </a:p>
@@ -6704,7 +7251,7 @@
           <p:cNvPr id="4" name="">
             <a:extLst xmlns:a="http://schemas.openxmlformats.org/drawingml/2006/main">
               <a:ext uri="{FF2B5EF4-FFF2-40B4-BE49-F238E27FC236}">
-                <a16:creationId xmlns:a16="http://schemas.microsoft.com/office/drawing/2014/main" id="{0886F201-9FF7-412C-999D-6C2978720C61}"/>
+                <a16:creationId xmlns:a16="http://schemas.microsoft.com/office/drawing/2014/main" id="{4C0D1F9C-AEF4-45E4-9B4F-AE692C70B40F}"/>
               </a:ext>
             </a:extLst>
           </p:cNvPr>
@@ -6714,7 +7261,7 @@
           <p:nvPr/>
         </p:nvPicPr>
         <p:blipFill>
-          <a:blip xmlns:r="http://schemas.openxmlformats.org/officeDocument/2006/relationships" xmlns:a="http://schemas.openxmlformats.org/drawingml/2006/main" r:embed="R7de515506b3f442b"/>
+          <a:blip xmlns:r="http://schemas.openxmlformats.org/officeDocument/2006/relationships" xmlns:a="http://schemas.openxmlformats.org/drawingml/2006/main" r:embed="R4d1ea70d50ec4b12"/>
           <a:stretch xmlns:a="http://schemas.openxmlformats.org/drawingml/2006/main"/>
         </p:blipFill>
         <p:spPr>
@@ -6730,7 +7277,7 @@
     </p:spTree>
     <p:extLst>
       <p:ext uri="{BB962C8B-B14F-4D97-AF65-F5344CB8AC3E}">
-        <p14:creationId xmlns:p14="http://schemas.microsoft.com/office/powerpoint/2010/main" val="1666083098"/>
+        <p14:creationId xmlns:p14="http://schemas.microsoft.com/office/powerpoint/2010/main" val="1216709524"/>
       </p:ext>
     </p:extLst>
   </p:cSld>
@@ -6754,7 +7301,7 @@
           <p:cNvPr id="2" name="Content Placeholder 2">
             <a:extLst xmlns:a="http://schemas.openxmlformats.org/drawingml/2006/main">
               <a:ext uri="{FF2B5EF4-FFF2-40B4-BE49-F238E27FC236}">
-                <a16:creationId xmlns:a16="http://schemas.microsoft.com/office/drawing/2014/main" id="{050F9D49-FF46-4370-8009-A0C19AC1871E}"/>
+                <a16:creationId xmlns:a16="http://schemas.microsoft.com/office/drawing/2014/main" id="{EF3EF742-A661-455F-A6FD-01ECF646B2CB}"/>
               </a:ext>
             </a:extLst>
           </p:cNvPr>
@@ -6774,7 +7321,7 @@
               <a:buNone/>
             </a:pPr>
             <a:r>
-              <a:t>Add changes the list in memory.</a:t>
+              <a:t>CollectionView repeats a row template.</a:t>
             </a:r>
           </a:p>
           <a:p xmlns:a="http://schemas.openxmlformats.org/drawingml/2006/main">
@@ -6782,7 +7329,7 @@
               <a:buNone/>
             </a:pPr>
             <a:r>
-              <a:t>This module refreshes ItemsSource by hand.</a:t>
+              <a:t>BindingContext supplies each row item.</a:t>
             </a:r>
           </a:p>
         </p:txBody>
@@ -6815,7 +7362,7 @@
           <a:lstStyle xmlns:a="http://schemas.openxmlformats.org/drawingml/2006/main"/>
           <a:p xmlns:a="http://schemas.openxmlformats.org/drawingml/2006/main">
             <a:r>
-              <a:t>Step 7 Add and refresh</a:t>
+              <a:t>Step 6: CollectionView rows</a:t>
             </a:r>
             <a:endParaRPr/>
           </a:p>
@@ -6824,7 +7371,7 @@
     </p:spTree>
     <p:extLst>
       <p:ext uri="{BB962C8B-B14F-4D97-AF65-F5344CB8AC3E}">
-        <p14:creationId xmlns:p14="http://schemas.microsoft.com/office/powerpoint/2010/main" val="1896152901"/>
+        <p14:creationId xmlns:p14="http://schemas.microsoft.com/office/powerpoint/2010/main" val="1842045749"/>
       </p:ext>
     </p:extLst>
   </p:cSld>
@@ -6848,7 +7395,7 @@
           <p:cNvPr id="2" name="Content Placeholder 2">
             <a:extLst xmlns:a="http://schemas.openxmlformats.org/drawingml/2006/main">
               <a:ext uri="{FF2B5EF4-FFF2-40B4-BE49-F238E27FC236}">
-                <a16:creationId xmlns:a16="http://schemas.microsoft.com/office/drawing/2014/main" id="{050F9D49-FF46-4370-8009-A0C19AC1871E}"/>
+                <a16:creationId xmlns:a16="http://schemas.microsoft.com/office/drawing/2014/main" id="{EF3EF742-A661-455F-A6FD-01ECF646B2CB}"/>
               </a:ext>
             </a:extLst>
           </p:cNvPr>
@@ -6868,7 +7415,7 @@
               <a:buNone/>
             </a:pPr>
             <a:r>
-              <a:t>The new row appears once.</a:t>
+              <a:t>The BOM shows each sample item.</a:t>
             </a:r>
           </a:p>
           <a:p xmlns:a="http://schemas.openxmlformats.org/drawingml/2006/main">
@@ -6876,7 +7423,7 @@
               <a:buNone/>
             </a:pPr>
             <a:r>
-              <a:t>Its total matches the editor result.</a:t>
+              <a:t>Each row shows its calculated cost.</a:t>
             </a:r>
           </a:p>
         </p:txBody>
@@ -6909,44 +7456,16 @@
           <a:lstStyle xmlns:a="http://schemas.openxmlformats.org/drawingml/2006/main"/>
           <a:p xmlns:a="http://schemas.openxmlformats.org/drawingml/2006/main">
             <a:r>
-              <a:t>Step 7 Check</a:t>
+              <a:t>Step 6: What changed?</a:t>
             </a:r>
             <a:endParaRPr/>
           </a:p>
         </p:txBody>
       </p:sp>
-      <p:pic>
-        <p:nvPicPr>
-          <p:cNvPr id="4" name="">
-            <a:extLst xmlns:a="http://schemas.openxmlformats.org/drawingml/2006/main">
-              <a:ext uri="{FF2B5EF4-FFF2-40B4-BE49-F238E27FC236}">
-                <a16:creationId xmlns:a16="http://schemas.microsoft.com/office/drawing/2014/main" id="{A0BCA67E-F6A0-4A16-A7FC-C39AF6E34410}"/>
-              </a:ext>
-            </a:extLst>
-          </p:cNvPr>
-          <p:cNvPicPr>
-            <a:picLocks xmlns:a="http://schemas.openxmlformats.org/drawingml/2006/main" noChangeAspect="1"/>
-          </p:cNvPicPr>
-          <p:nvPr/>
-        </p:nvPicPr>
-        <p:blipFill>
-          <a:blip xmlns:r="http://schemas.openxmlformats.org/officeDocument/2006/relationships" xmlns:a="http://schemas.openxmlformats.org/drawingml/2006/main" r:embed="Radd998328bef4911"/>
-          <a:stretch xmlns:a="http://schemas.openxmlformats.org/drawingml/2006/main"/>
-        </p:blipFill>
-        <p:spPr>
-          <a:xfrm xmlns:a="http://schemas.openxmlformats.org/drawingml/2006/main">
-            <a:off x="3418237" y="3190875"/>
-            <a:ext cx="5355525" cy="3048000"/>
-          </a:xfrm>
-          <a:prstGeom xmlns:a="http://schemas.openxmlformats.org/drawingml/2006/main" prst="rect">
-            <a:avLst/>
-          </a:prstGeom>
-        </p:spPr>
-      </p:pic>
     </p:spTree>
     <p:extLst>
       <p:ext uri="{BB962C8B-B14F-4D97-AF65-F5344CB8AC3E}">
-        <p14:creationId xmlns:p14="http://schemas.microsoft.com/office/powerpoint/2010/main" val="1274362802"/>
+        <p14:creationId xmlns:p14="http://schemas.microsoft.com/office/powerpoint/2010/main" val="1927687854"/>
       </p:ext>
     </p:extLst>
   </p:cSld>
@@ -6970,7 +7489,7 @@
           <p:cNvPr id="2" name="Content Placeholder 2">
             <a:extLst xmlns:a="http://schemas.openxmlformats.org/drawingml/2006/main">
               <a:ext uri="{FF2B5EF4-FFF2-40B4-BE49-F238E27FC236}">
-                <a16:creationId xmlns:a16="http://schemas.microsoft.com/office/drawing/2014/main" id="{050F9D49-FF46-4370-8009-A0C19AC1871E}"/>
+                <a16:creationId xmlns:a16="http://schemas.microsoft.com/office/drawing/2014/main" id="{EF3EF742-A661-455F-A6FD-01ECF646B2CB}"/>
               </a:ext>
             </a:extLst>
           </p:cNvPr>
@@ -6990,7 +7509,7 @@
               <a:buNone/>
             </a:pPr>
             <a:r>
-              <a:t>Pass the selected item to the editor.</a:t>
+              <a:t>Add changes the list in memory.</a:t>
             </a:r>
           </a:p>
           <a:p xmlns:a="http://schemas.openxmlformats.org/drawingml/2006/main">
@@ -6998,7 +7517,7 @@
               <a:buNone/>
             </a:pPr>
             <a:r>
-              <a:t>Replace the original only after Submit.</a:t>
+              <a:t>This module refreshes ItemsSource by hand.</a:t>
             </a:r>
           </a:p>
         </p:txBody>
@@ -7031,7 +7550,7 @@
           <a:lstStyle xmlns:a="http://schemas.openxmlformats.org/drawingml/2006/main"/>
           <a:p xmlns:a="http://schemas.openxmlformats.org/drawingml/2006/main">
             <a:r>
-              <a:t>Step 8 Edit an existing row</a:t>
+              <a:t>Step 7: Add and refresh</a:t>
             </a:r>
             <a:endParaRPr/>
           </a:p>
@@ -7040,7 +7559,7 @@
     </p:spTree>
     <p:extLst>
       <p:ext uri="{BB962C8B-B14F-4D97-AF65-F5344CB8AC3E}">
-        <p14:creationId xmlns:p14="http://schemas.microsoft.com/office/powerpoint/2010/main" val="585549359"/>
+        <p14:creationId xmlns:p14="http://schemas.microsoft.com/office/powerpoint/2010/main" val="1671593976"/>
       </p:ext>
     </p:extLst>
   </p:cSld>
